--- a/SEGER_COMERCIAL_IMPORTADORA_E.pptx
+++ b/SEGER_COMERCIAL_IMPORTADORA_E.pptx
@@ -162,7 +162,7 @@
                 <c:formatCode>General</c:formatCode>
                 <c:ptCount val="2"/>
                 <c:pt idx="0">
-                  <c:v>18</c:v>
+                  <c:v>0</c:v>
                 </c:pt>
                 <c:pt idx="1">
                   <c:v>33</c:v>
@@ -211,7 +211,7 @@
                 <c:formatCode>General</c:formatCode>
                 <c:ptCount val="2"/>
                 <c:pt idx="0">
-                  <c:v>1</c:v>
+                  <c:v>0</c:v>
                 </c:pt>
                 <c:pt idx="1">
                   <c:v>3</c:v>
@@ -3688,7 +3688,7 @@
         <p:spPr>
           <a:xfrm>
             <a:off x="1005840" y="2240279"/>
-            <a:ext cx="2377439" cy="891540"/>
+            <a:ext cx="2377440" cy="868680"/>
           </a:xfrm>
           <a:prstGeom prst="rect">
             <a:avLst/>
@@ -3722,8 +3722,8 @@
         </p:nvSpPr>
         <p:spPr>
           <a:xfrm>
-            <a:off x="1005840" y="3058668"/>
-            <a:ext cx="2377439" cy="548640"/>
+            <a:off x="1005840" y="3090672"/>
+            <a:ext cx="2377440" cy="411480"/>
           </a:xfrm>
           <a:prstGeom prst="rect">
             <a:avLst/>
@@ -3803,7 +3803,7 @@
         <p:spPr>
           <a:xfrm>
             <a:off x="3931920" y="2240279"/>
-            <a:ext cx="2377439" cy="891540"/>
+            <a:ext cx="2377440" cy="868680"/>
           </a:xfrm>
           <a:prstGeom prst="rect">
             <a:avLst/>
@@ -3837,8 +3837,8 @@
         </p:nvSpPr>
         <p:spPr>
           <a:xfrm>
-            <a:off x="3931920" y="3058668"/>
-            <a:ext cx="2377439" cy="548640"/>
+            <a:off x="3931920" y="3090672"/>
+            <a:ext cx="2377440" cy="411480"/>
           </a:xfrm>
           <a:prstGeom prst="rect">
             <a:avLst/>
@@ -3918,7 +3918,7 @@
         <p:spPr>
           <a:xfrm>
             <a:off x="6858000" y="2240279"/>
-            <a:ext cx="2377439" cy="891540"/>
+            <a:ext cx="2377440" cy="868680"/>
           </a:xfrm>
           <a:prstGeom prst="rect">
             <a:avLst/>
@@ -3952,8 +3952,8 @@
         </p:nvSpPr>
         <p:spPr>
           <a:xfrm>
-            <a:off x="6858000" y="3058668"/>
-            <a:ext cx="2377439" cy="548640"/>
+            <a:off x="6858000" y="3090672"/>
+            <a:ext cx="2377440" cy="411480"/>
           </a:xfrm>
           <a:prstGeom prst="rect">
             <a:avLst/>
@@ -4033,7 +4033,7 @@
         <p:spPr>
           <a:xfrm>
             <a:off x="9784080" y="2240279"/>
-            <a:ext cx="2377439" cy="891540"/>
+            <a:ext cx="2377440" cy="868680"/>
           </a:xfrm>
           <a:prstGeom prst="rect">
             <a:avLst/>
@@ -4067,8 +4067,8 @@
         </p:nvSpPr>
         <p:spPr>
           <a:xfrm>
-            <a:off x="9784080" y="3058668"/>
-            <a:ext cx="2377439" cy="548640"/>
+            <a:off x="9784080" y="3090672"/>
+            <a:ext cx="2377440" cy="411480"/>
           </a:xfrm>
           <a:prstGeom prst="rect">
             <a:avLst/>
@@ -4121,7 +4121,7 @@
               <a:tr h="475488">
                 <a:tc>
                   <a:txBody>
-                    <a:bodyPr wrap="square"/>
+                    <a:bodyPr/>
                     <a:lstStyle/>
                     <a:p>
                       <a:pPr algn="ctr"/>
@@ -4144,7 +4144,7 @@
                 </a:tc>
                 <a:tc>
                   <a:txBody>
-                    <a:bodyPr wrap="square"/>
+                    <a:bodyPr/>
                     <a:lstStyle/>
                     <a:p>
                       <a:pPr algn="ctr"/>
@@ -4167,7 +4167,7 @@
                 </a:tc>
                 <a:tc>
                   <a:txBody>
-                    <a:bodyPr wrap="square"/>
+                    <a:bodyPr/>
                     <a:lstStyle/>
                     <a:p>
                       <a:pPr algn="ctr"/>
@@ -4190,7 +4190,7 @@
                 </a:tc>
                 <a:tc>
                   <a:txBody>
-                    <a:bodyPr wrap="square"/>
+                    <a:bodyPr/>
                     <a:lstStyle/>
                     <a:p>
                       <a:pPr algn="ctr"/>
@@ -4215,18 +4215,18 @@
               <a:tr h="475488">
                 <a:tc>
                   <a:txBody>
-                    <a:bodyPr wrap="square"/>
-                    <a:lstStyle/>
-                    <a:p>
-                      <a:pPr algn="l"/>
-                      <a:r>
-                        <a:rPr sz="1000" b="0">
-                          <a:solidFill>
-                            <a:srgbClr val="1D1B43"/>
-                          </a:solidFill>
-                          <a:latin typeface="Calibri"/>
-                        </a:rPr>
-                        <a:t>Total Entregas</a:t>
+                    <a:bodyPr/>
+                    <a:lstStyle/>
+                    <a:p>
+                      <a:pPr algn="l"/>
+                      <a:r>
+                        <a:rPr sz="1000" b="0">
+                          <a:solidFill>
+                            <a:srgbClr val="1D1B43"/>
+                          </a:solidFill>
+                          <a:latin typeface="Calibri"/>
+                        </a:rPr>
+                        <a:t>Total</a:t>
                       </a:r>
                     </a:p>
                   </a:txBody>
@@ -4238,18 +4238,18 @@
                 </a:tc>
                 <a:tc>
                   <a:txBody>
-                    <a:bodyPr wrap="square"/>
-                    <a:lstStyle/>
-                    <a:p>
-                      <a:pPr algn="l"/>
-                      <a:r>
-                        <a:rPr sz="1000" b="0">
-                          <a:solidFill>
-                            <a:srgbClr val="1D1B43"/>
-                          </a:solidFill>
-                          <a:latin typeface="Calibri"/>
-                        </a:rPr>
-                        <a:t>19</a:t>
+                    <a:bodyPr/>
+                    <a:lstStyle/>
+                    <a:p>
+                      <a:pPr algn="l"/>
+                      <a:r>
+                        <a:rPr sz="1000" b="0">
+                          <a:solidFill>
+                            <a:srgbClr val="1D1B43"/>
+                          </a:solidFill>
+                          <a:latin typeface="Calibri"/>
+                        </a:rPr>
+                        <a:t>0</a:t>
                       </a:r>
                     </a:p>
                   </a:txBody>
@@ -4261,7 +4261,7 @@
                 </a:tc>
                 <a:tc>
                   <a:txBody>
-                    <a:bodyPr wrap="square"/>
+                    <a:bodyPr/>
                     <a:lstStyle/>
                     <a:p>
                       <a:pPr algn="l"/>
@@ -4284,18 +4284,18 @@
                 </a:tc>
                 <a:tc>
                   <a:txBody>
-                    <a:bodyPr wrap="square"/>
-                    <a:lstStyle/>
-                    <a:p>
-                      <a:pPr algn="l"/>
-                      <a:r>
-                        <a:rPr sz="1000" b="0">
-                          <a:solidFill>
-                            <a:srgbClr val="1D1B43"/>
-                          </a:solidFill>
-                          <a:latin typeface="Calibri"/>
-                        </a:rPr>
-                        <a:t>+ 17</a:t>
+                    <a:bodyPr/>
+                    <a:lstStyle/>
+                    <a:p>
+                      <a:pPr algn="l"/>
+                      <a:r>
+                        <a:rPr sz="1000" b="0">
+                          <a:solidFill>
+                            <a:srgbClr val="1D1B43"/>
+                          </a:solidFill>
+                          <a:latin typeface="Calibri"/>
+                        </a:rPr>
+                        <a:t>+ 36</a:t>
                       </a:r>
                     </a:p>
                   </a:txBody>
@@ -4309,7 +4309,7 @@
               <a:tr h="475488">
                 <a:tc>
                   <a:txBody>
-                    <a:bodyPr wrap="square"/>
+                    <a:bodyPr/>
                     <a:lstStyle/>
                     <a:p>
                       <a:pPr algn="l"/>
@@ -4332,18 +4332,18 @@
                 </a:tc>
                 <a:tc>
                   <a:txBody>
-                    <a:bodyPr wrap="square"/>
-                    <a:lstStyle/>
-                    <a:p>
-                      <a:pPr algn="l"/>
-                      <a:r>
-                        <a:rPr sz="1000" b="0">
-                          <a:solidFill>
-                            <a:srgbClr val="1D1B43"/>
-                          </a:solidFill>
-                          <a:latin typeface="Calibri"/>
-                        </a:rPr>
-                        <a:t>18</a:t>
+                    <a:bodyPr/>
+                    <a:lstStyle/>
+                    <a:p>
+                      <a:pPr algn="l"/>
+                      <a:r>
+                        <a:rPr sz="1000" b="0">
+                          <a:solidFill>
+                            <a:srgbClr val="1D1B43"/>
+                          </a:solidFill>
+                          <a:latin typeface="Calibri"/>
+                        </a:rPr>
+                        <a:t>0</a:t>
                       </a:r>
                     </a:p>
                   </a:txBody>
@@ -4355,7 +4355,7 @@
                 </a:tc>
                 <a:tc>
                   <a:txBody>
-                    <a:bodyPr wrap="square"/>
+                    <a:bodyPr/>
                     <a:lstStyle/>
                     <a:p>
                       <a:pPr algn="l"/>
@@ -4378,18 +4378,18 @@
                 </a:tc>
                 <a:tc>
                   <a:txBody>
-                    <a:bodyPr wrap="square"/>
-                    <a:lstStyle/>
-                    <a:p>
-                      <a:pPr algn="l"/>
-                      <a:r>
-                        <a:rPr sz="1000" b="0">
-                          <a:solidFill>
-                            <a:srgbClr val="1D1B43"/>
-                          </a:solidFill>
-                          <a:latin typeface="Calibri"/>
-                        </a:rPr>
-                        <a:t>+ 15</a:t>
+                    <a:bodyPr/>
+                    <a:lstStyle/>
+                    <a:p>
+                      <a:pPr algn="l"/>
+                      <a:r>
+                        <a:rPr sz="1000" b="0">
+                          <a:solidFill>
+                            <a:srgbClr val="1D1B43"/>
+                          </a:solidFill>
+                          <a:latin typeface="Calibri"/>
+                        </a:rPr>
+                        <a:t>+ 33</a:t>
                       </a:r>
                     </a:p>
                   </a:txBody>
@@ -4403,18 +4403,18 @@
               <a:tr h="475488">
                 <a:tc>
                   <a:txBody>
-                    <a:bodyPr wrap="square"/>
-                    <a:lstStyle/>
-                    <a:p>
-                      <a:pPr algn="l"/>
-                      <a:r>
-                        <a:rPr sz="1000" b="0">
-                          <a:solidFill>
-                            <a:srgbClr val="1D1B43"/>
-                          </a:solidFill>
-                          <a:latin typeface="Calibri"/>
-                        </a:rPr>
-                        <a:t>Fora do Prazo</a:t>
+                    <a:bodyPr/>
+                    <a:lstStyle/>
+                    <a:p>
+                      <a:pPr algn="l"/>
+                      <a:r>
+                        <a:rPr sz="1000" b="0">
+                          <a:solidFill>
+                            <a:srgbClr val="1D1B43"/>
+                          </a:solidFill>
+                          <a:latin typeface="Calibri"/>
+                        </a:rPr>
+                        <a:t>Fora Prazo</a:t>
                       </a:r>
                     </a:p>
                   </a:txBody>
@@ -4426,18 +4426,18 @@
                 </a:tc>
                 <a:tc>
                   <a:txBody>
-                    <a:bodyPr wrap="square"/>
-                    <a:lstStyle/>
-                    <a:p>
-                      <a:pPr algn="l"/>
-                      <a:r>
-                        <a:rPr sz="1000" b="0">
-                          <a:solidFill>
-                            <a:srgbClr val="1D1B43"/>
-                          </a:solidFill>
-                          <a:latin typeface="Calibri"/>
-                        </a:rPr>
-                        <a:t>1</a:t>
+                    <a:bodyPr/>
+                    <a:lstStyle/>
+                    <a:p>
+                      <a:pPr algn="l"/>
+                      <a:r>
+                        <a:rPr sz="1000" b="0">
+                          <a:solidFill>
+                            <a:srgbClr val="1D1B43"/>
+                          </a:solidFill>
+                          <a:latin typeface="Calibri"/>
+                        </a:rPr>
+                        <a:t>0</a:t>
                       </a:r>
                     </a:p>
                   </a:txBody>
@@ -4449,7 +4449,7 @@
                 </a:tc>
                 <a:tc>
                   <a:txBody>
-                    <a:bodyPr wrap="square"/>
+                    <a:bodyPr/>
                     <a:lstStyle/>
                     <a:p>
                       <a:pPr algn="l"/>
@@ -4472,18 +4472,18 @@
                 </a:tc>
                 <a:tc>
                   <a:txBody>
-                    <a:bodyPr wrap="square"/>
-                    <a:lstStyle/>
-                    <a:p>
-                      <a:pPr algn="l"/>
-                      <a:r>
-                        <a:rPr sz="1000" b="0">
-                          <a:solidFill>
-                            <a:srgbClr val="1D1B43"/>
-                          </a:solidFill>
-                          <a:latin typeface="Calibri"/>
-                        </a:rPr>
-                        <a:t>+ 2</a:t>
+                    <a:bodyPr/>
+                    <a:lstStyle/>
+                    <a:p>
+                      <a:pPr algn="l"/>
+                      <a:r>
+                        <a:rPr sz="1000" b="0">
+                          <a:solidFill>
+                            <a:srgbClr val="1D1B43"/>
+                          </a:solidFill>
+                          <a:latin typeface="Calibri"/>
+                        </a:rPr>
+                        <a:t>+ 3</a:t>
                       </a:r>
                     </a:p>
                   </a:txBody>
@@ -4497,7 +4497,7 @@
               <a:tr h="475488">
                 <a:tc>
                   <a:txBody>
-                    <a:bodyPr wrap="square"/>
+                    <a:bodyPr/>
                     <a:lstStyle/>
                     <a:p>
                       <a:pPr algn="l"/>
@@ -4520,18 +4520,18 @@
                 </a:tc>
                 <a:tc>
                   <a:txBody>
-                    <a:bodyPr wrap="square"/>
-                    <a:lstStyle/>
-                    <a:p>
-                      <a:pPr algn="l"/>
-                      <a:r>
-                        <a:rPr sz="1000" b="0">
-                          <a:solidFill>
-                            <a:srgbClr val="1D1B43"/>
-                          </a:solidFill>
-                          <a:latin typeface="Calibri"/>
-                        </a:rPr>
-                        <a:t>94.7%</a:t>
+                    <a:bodyPr/>
+                    <a:lstStyle/>
+                    <a:p>
+                      <a:pPr algn="l"/>
+                      <a:r>
+                        <a:rPr sz="1000" b="0">
+                          <a:solidFill>
+                            <a:srgbClr val="1D1B43"/>
+                          </a:solidFill>
+                          <a:latin typeface="Calibri"/>
+                        </a:rPr>
+                        <a:t>91.7%</a:t>
                       </a:r>
                     </a:p>
                   </a:txBody>
@@ -4543,7 +4543,7 @@
                 </a:tc>
                 <a:tc>
                   <a:txBody>
-                    <a:bodyPr wrap="square"/>
+                    <a:bodyPr/>
                     <a:lstStyle/>
                     <a:p>
                       <a:pPr algn="l"/>
@@ -4566,18 +4566,18 @@
                 </a:tc>
                 <a:tc>
                   <a:txBody>
-                    <a:bodyPr wrap="square"/>
-                    <a:lstStyle/>
-                    <a:p>
-                      <a:pPr algn="l"/>
-                      <a:r>
-                        <a:rPr sz="1000" b="0">
-                          <a:solidFill>
-                            <a:srgbClr val="1D1B43"/>
-                          </a:solidFill>
-                          <a:latin typeface="Calibri"/>
-                        </a:rPr>
-                        <a:t>- 3.0pp</a:t>
+                    <a:bodyPr/>
+                    <a:lstStyle/>
+                    <a:p>
+                      <a:pPr algn="l"/>
+                      <a:r>
+                        <a:rPr sz="1000" b="0">
+                          <a:solidFill>
+                            <a:srgbClr val="1D1B43"/>
+                          </a:solidFill>
+                          <a:latin typeface="Calibri"/>
+                        </a:rPr>
+                        <a:t>+ 0.0pp</a:t>
                       </a:r>
                     </a:p>
                   </a:txBody>
@@ -4766,7 +4766,7 @@
               <a:tr h="438912">
                 <a:tc>
                   <a:txBody>
-                    <a:bodyPr wrap="square"/>
+                    <a:bodyPr/>
                     <a:lstStyle/>
                     <a:p>
                       <a:pPr algn="ctr"/>
@@ -4789,7 +4789,7 @@
                 </a:tc>
                 <a:tc>
                   <a:txBody>
-                    <a:bodyPr wrap="square"/>
+                    <a:bodyPr/>
                     <a:lstStyle/>
                     <a:p>
                       <a:pPr algn="ctr"/>
@@ -4812,7 +4812,7 @@
                 </a:tc>
                 <a:tc>
                   <a:txBody>
-                    <a:bodyPr wrap="square"/>
+                    <a:bodyPr/>
                     <a:lstStyle/>
                     <a:p>
                       <a:pPr algn="ctr"/>
@@ -4835,7 +4835,7 @@
                 </a:tc>
                 <a:tc>
                   <a:txBody>
-                    <a:bodyPr wrap="square"/>
+                    <a:bodyPr/>
                     <a:lstStyle/>
                     <a:p>
                       <a:pPr algn="ctr"/>
@@ -4858,7 +4858,7 @@
                 </a:tc>
                 <a:tc>
                   <a:txBody>
-                    <a:bodyPr wrap="square"/>
+                    <a:bodyPr/>
                     <a:lstStyle/>
                     <a:p>
                       <a:pPr algn="ctr"/>
@@ -4883,7 +4883,7 @@
               <a:tr h="438912">
                 <a:tc>
                   <a:txBody>
-                    <a:bodyPr wrap="square"/>
+                    <a:bodyPr/>
                     <a:lstStyle/>
                     <a:p>
                       <a:pPr algn="l"/>
@@ -4906,18 +4906,18 @@
                 </a:tc>
                 <a:tc>
                   <a:txBody>
-                    <a:bodyPr wrap="square"/>
-                    <a:lstStyle/>
-                    <a:p>
-                      <a:pPr algn="l"/>
-                      <a:r>
-                        <a:rPr sz="1000" b="0">
-                          <a:solidFill>
-                            <a:srgbClr val="1D1B43"/>
-                          </a:solidFill>
-                          <a:latin typeface="Calibri"/>
-                        </a:rPr>
-                        <a:t>19</a:t>
+                    <a:bodyPr/>
+                    <a:lstStyle/>
+                    <a:p>
+                      <a:pPr algn="l"/>
+                      <a:r>
+                        <a:rPr sz="1000" b="0">
+                          <a:solidFill>
+                            <a:srgbClr val="1D1B43"/>
+                          </a:solidFill>
+                          <a:latin typeface="Calibri"/>
+                        </a:rPr>
+                        <a:t>0</a:t>
                       </a:r>
                     </a:p>
                   </a:txBody>
@@ -4929,18 +4929,18 @@
                 </a:tc>
                 <a:tc>
                   <a:txBody>
-                    <a:bodyPr wrap="square"/>
-                    <a:lstStyle/>
-                    <a:p>
-                      <a:pPr algn="l"/>
-                      <a:r>
-                        <a:rPr sz="1000" b="0">
-                          <a:solidFill>
-                            <a:srgbClr val="1D1B43"/>
-                          </a:solidFill>
-                          <a:latin typeface="Calibri"/>
-                        </a:rPr>
-                        <a:t>18</a:t>
+                    <a:bodyPr/>
+                    <a:lstStyle/>
+                    <a:p>
+                      <a:pPr algn="l"/>
+                      <a:r>
+                        <a:rPr sz="1000" b="0">
+                          <a:solidFill>
+                            <a:srgbClr val="1D1B43"/>
+                          </a:solidFill>
+                          <a:latin typeface="Calibri"/>
+                        </a:rPr>
+                        <a:t>0</a:t>
                       </a:r>
                     </a:p>
                   </a:txBody>
@@ -4952,18 +4952,18 @@
                 </a:tc>
                 <a:tc>
                   <a:txBody>
-                    <a:bodyPr wrap="square"/>
-                    <a:lstStyle/>
-                    <a:p>
-                      <a:pPr algn="l"/>
-                      <a:r>
-                        <a:rPr sz="1000" b="0">
-                          <a:solidFill>
-                            <a:srgbClr val="1D1B43"/>
-                          </a:solidFill>
-                          <a:latin typeface="Calibri"/>
-                        </a:rPr>
-                        <a:t>1</a:t>
+                    <a:bodyPr/>
+                    <a:lstStyle/>
+                    <a:p>
+                      <a:pPr algn="l"/>
+                      <a:r>
+                        <a:rPr sz="1000" b="0">
+                          <a:solidFill>
+                            <a:srgbClr val="1D1B43"/>
+                          </a:solidFill>
+                          <a:latin typeface="Calibri"/>
+                        </a:rPr>
+                        <a:t>0</a:t>
                       </a:r>
                     </a:p>
                   </a:txBody>
@@ -4975,18 +4975,18 @@
                 </a:tc>
                 <a:tc>
                   <a:txBody>
-                    <a:bodyPr wrap="square"/>
-                    <a:lstStyle/>
-                    <a:p>
-                      <a:pPr algn="l"/>
-                      <a:r>
-                        <a:rPr sz="1000" b="0">
-                          <a:solidFill>
-                            <a:srgbClr val="1D1B43"/>
-                          </a:solidFill>
-                          <a:latin typeface="Calibri"/>
-                        </a:rPr>
-                        <a:t>94.7%</a:t>
+                    <a:bodyPr/>
+                    <a:lstStyle/>
+                    <a:p>
+                      <a:pPr algn="l"/>
+                      <a:r>
+                        <a:rPr sz="1000" b="0">
+                          <a:solidFill>
+                            <a:srgbClr val="1D1B43"/>
+                          </a:solidFill>
+                          <a:latin typeface="Calibri"/>
+                        </a:rPr>
+                        <a:t>91.7%</a:t>
                       </a:r>
                     </a:p>
                   </a:txBody>
@@ -5000,7 +5000,7 @@
               <a:tr h="438912">
                 <a:tc>
                   <a:txBody>
-                    <a:bodyPr wrap="square"/>
+                    <a:bodyPr/>
                     <a:lstStyle/>
                     <a:p>
                       <a:pPr algn="l"/>
@@ -5023,7 +5023,7 @@
                 </a:tc>
                 <a:tc>
                   <a:txBody>
-                    <a:bodyPr wrap="square"/>
+                    <a:bodyPr/>
                     <a:lstStyle/>
                     <a:p>
                       <a:pPr algn="l"/>
@@ -5046,7 +5046,7 @@
                 </a:tc>
                 <a:tc>
                   <a:txBody>
-                    <a:bodyPr wrap="square"/>
+                    <a:bodyPr/>
                     <a:lstStyle/>
                     <a:p>
                       <a:pPr algn="l"/>
@@ -5069,7 +5069,7 @@
                 </a:tc>
                 <a:tc>
                   <a:txBody>
-                    <a:bodyPr wrap="square"/>
+                    <a:bodyPr/>
                     <a:lstStyle/>
                     <a:p>
                       <a:pPr algn="l"/>
@@ -5092,7 +5092,7 @@
                 </a:tc>
                 <a:tc>
                   <a:txBody>
-                    <a:bodyPr wrap="square"/>
+                    <a:bodyPr/>
                     <a:lstStyle/>
                     <a:p>
                       <a:pPr algn="l"/>
@@ -5352,7 +5352,7 @@
               <a:tr h="384048">
                 <a:tc>
                   <a:txBody>
-                    <a:bodyPr wrap="square"/>
+                    <a:bodyPr/>
                     <a:lstStyle/>
                     <a:p>
                       <a:pPr algn="ctr"/>
@@ -5375,7 +5375,7 @@
                 </a:tc>
                 <a:tc>
                   <a:txBody>
-                    <a:bodyPr wrap="square"/>
+                    <a:bodyPr/>
                     <a:lstStyle/>
                     <a:p>
                       <a:pPr algn="ctr"/>
@@ -5398,7 +5398,7 @@
                 </a:tc>
                 <a:tc>
                   <a:txBody>
-                    <a:bodyPr wrap="square"/>
+                    <a:bodyPr/>
                     <a:lstStyle/>
                     <a:p>
                       <a:pPr algn="ctr"/>
@@ -5421,7 +5421,7 @@
                 </a:tc>
                 <a:tc>
                   <a:txBody>
-                    <a:bodyPr wrap="square"/>
+                    <a:bodyPr/>
                     <a:lstStyle/>
                     <a:p>
                       <a:pPr algn="ctr"/>
@@ -5444,7 +5444,7 @@
                 </a:tc>
                 <a:tc>
                   <a:txBody>
-                    <a:bodyPr wrap="square"/>
+                    <a:bodyPr/>
                     <a:lstStyle/>
                     <a:p>
                       <a:pPr algn="ctr"/>
@@ -5469,7 +5469,7 @@
               <a:tr h="384048">
                 <a:tc>
                   <a:txBody>
-                    <a:bodyPr wrap="square"/>
+                    <a:bodyPr/>
                     <a:lstStyle/>
                     <a:p>
                       <a:pPr algn="l"/>
@@ -5492,7 +5492,7 @@
                 </a:tc>
                 <a:tc>
                   <a:txBody>
-                    <a:bodyPr wrap="square"/>
+                    <a:bodyPr/>
                     <a:lstStyle/>
                     <a:p>
                       <a:pPr algn="l"/>
@@ -5515,7 +5515,7 @@
                 </a:tc>
                 <a:tc>
                   <a:txBody>
-                    <a:bodyPr wrap="square"/>
+                    <a:bodyPr/>
                     <a:lstStyle/>
                     <a:p>
                       <a:pPr algn="l"/>
@@ -5538,7 +5538,7 @@
                 </a:tc>
                 <a:tc>
                   <a:txBody>
-                    <a:bodyPr wrap="square"/>
+                    <a:bodyPr/>
                     <a:lstStyle/>
                     <a:p>
                       <a:pPr algn="l"/>
@@ -5561,7 +5561,7 @@
                 </a:tc>
                 <a:tc>
                   <a:txBody>
-                    <a:bodyPr wrap="square"/>
+                    <a:bodyPr/>
                     <a:lstStyle/>
                     <a:p>
                       <a:pPr algn="l"/>
@@ -5586,7 +5586,7 @@
               <a:tr h="384048">
                 <a:tc>
                   <a:txBody>
-                    <a:bodyPr wrap="square"/>
+                    <a:bodyPr/>
                     <a:lstStyle/>
                     <a:p>
                       <a:pPr algn="l"/>
@@ -5609,7 +5609,7 @@
                 </a:tc>
                 <a:tc>
                   <a:txBody>
-                    <a:bodyPr wrap="square"/>
+                    <a:bodyPr/>
                     <a:lstStyle/>
                     <a:p>
                       <a:pPr algn="l"/>
@@ -5632,7 +5632,7 @@
                 </a:tc>
                 <a:tc>
                   <a:txBody>
-                    <a:bodyPr wrap="square"/>
+                    <a:bodyPr/>
                     <a:lstStyle/>
                     <a:p>
                       <a:pPr algn="l"/>
@@ -5655,7 +5655,7 @@
                 </a:tc>
                 <a:tc>
                   <a:txBody>
-                    <a:bodyPr wrap="square"/>
+                    <a:bodyPr/>
                     <a:lstStyle/>
                     <a:p>
                       <a:pPr algn="l"/>
@@ -5678,18 +5678,18 @@
                 </a:tc>
                 <a:tc>
                   <a:txBody>
-                    <a:bodyPr wrap="square"/>
-                    <a:lstStyle/>
-                    <a:p>
-                      <a:pPr algn="l"/>
-                      <a:r>
-                        <a:rPr sz="1000" b="0">
-                          <a:solidFill>
-                            <a:srgbClr val="1D1B43"/>
-                          </a:solidFill>
-                          <a:latin typeface="Calibri"/>
-                        </a:rPr>
-                        <a:t>FORA DO PRAZO</a:t>
+                    <a:bodyPr/>
+                    <a:lstStyle/>
+                    <a:p>
+                      <a:pPr algn="l"/>
+                      <a:r>
+                        <a:rPr sz="1000" b="0">
+                          <a:solidFill>
+                            <a:srgbClr val="1D1B43"/>
+                          </a:solidFill>
+                          <a:latin typeface="Calibri"/>
+                        </a:rPr>
+                        <a:t>ENTREGUE FORA DO PRAZO</a:t>
                       </a:r>
                     </a:p>
                   </a:txBody>
@@ -5703,7 +5703,7 @@
               <a:tr h="384048">
                 <a:tc>
                   <a:txBody>
-                    <a:bodyPr wrap="square"/>
+                    <a:bodyPr/>
                     <a:lstStyle/>
                     <a:p>
                       <a:pPr algn="l"/>
@@ -5726,7 +5726,7 @@
                 </a:tc>
                 <a:tc>
                   <a:txBody>
-                    <a:bodyPr wrap="square"/>
+                    <a:bodyPr/>
                     <a:lstStyle/>
                     <a:p>
                       <a:pPr algn="l"/>
@@ -5749,7 +5749,7 @@
                 </a:tc>
                 <a:tc>
                   <a:txBody>
-                    <a:bodyPr wrap="square"/>
+                    <a:bodyPr/>
                     <a:lstStyle/>
                     <a:p>
                       <a:pPr algn="l"/>
@@ -5772,7 +5772,7 @@
                 </a:tc>
                 <a:tc>
                   <a:txBody>
-                    <a:bodyPr wrap="square"/>
+                    <a:bodyPr/>
                     <a:lstStyle/>
                     <a:p>
                       <a:pPr algn="l"/>
@@ -5795,7 +5795,7 @@
                 </a:tc>
                 <a:tc>
                   <a:txBody>
-                    <a:bodyPr wrap="square"/>
+                    <a:bodyPr/>
                     <a:lstStyle/>
                     <a:p>
                       <a:pPr algn="l"/>
@@ -5978,7 +5978,7 @@
               <a:tr h="457200">
                 <a:tc>
                   <a:txBody>
-                    <a:bodyPr wrap="square"/>
+                    <a:bodyPr/>
                     <a:lstStyle/>
                     <a:p>
                       <a:pPr algn="ctr"/>
@@ -6001,7 +6001,7 @@
                 </a:tc>
                 <a:tc>
                   <a:txBody>
-                    <a:bodyPr wrap="square"/>
+                    <a:bodyPr/>
                     <a:lstStyle/>
                     <a:p>
                       <a:pPr algn="ctr"/>
@@ -6024,7 +6024,7 @@
                 </a:tc>
                 <a:tc>
                   <a:txBody>
-                    <a:bodyPr wrap="square"/>
+                    <a:bodyPr/>
                     <a:lstStyle/>
                     <a:p>
                       <a:pPr algn="ctr"/>
@@ -6047,7 +6047,7 @@
                 </a:tc>
                 <a:tc>
                   <a:txBody>
-                    <a:bodyPr wrap="square"/>
+                    <a:bodyPr/>
                     <a:lstStyle/>
                     <a:p>
                       <a:pPr algn="ctr"/>
@@ -6070,7 +6070,7 @@
                 </a:tc>
                 <a:tc>
                   <a:txBody>
-                    <a:bodyPr wrap="square"/>
+                    <a:bodyPr/>
                     <a:lstStyle/>
                     <a:p>
                       <a:pPr algn="ctr"/>
@@ -6093,7 +6093,7 @@
                 </a:tc>
                 <a:tc>
                   <a:txBody>
-                    <a:bodyPr wrap="square"/>
+                    <a:bodyPr/>
                     <a:lstStyle/>
                     <a:p>
                       <a:pPr algn="ctr"/>
@@ -6118,7 +6118,7 @@
               <a:tr h="457200">
                 <a:tc>
                   <a:txBody>
-                    <a:bodyPr wrap="square"/>
+                    <a:bodyPr/>
                     <a:lstStyle/>
                     <a:p>
                       <a:pPr algn="l"/>
@@ -6141,7 +6141,7 @@
                 </a:tc>
                 <a:tc>
                   <a:txBody>
-                    <a:bodyPr wrap="square"/>
+                    <a:bodyPr/>
                     <a:lstStyle/>
                     <a:p>
                       <a:pPr algn="l"/>
@@ -6164,7 +6164,7 @@
                 </a:tc>
                 <a:tc>
                   <a:txBody>
-                    <a:bodyPr wrap="square"/>
+                    <a:bodyPr/>
                     <a:lstStyle/>
                     <a:p>
                       <a:pPr algn="l"/>
@@ -6187,7 +6187,7 @@
                 </a:tc>
                 <a:tc>
                   <a:txBody>
-                    <a:bodyPr wrap="square"/>
+                    <a:bodyPr/>
                     <a:lstStyle/>
                     <a:p>
                       <a:pPr algn="l"/>
@@ -6210,7 +6210,7 @@
                 </a:tc>
                 <a:tc>
                   <a:txBody>
-                    <a:bodyPr wrap="square"/>
+                    <a:bodyPr/>
                     <a:lstStyle/>
                     <a:p>
                       <a:pPr algn="l"/>
@@ -6233,7 +6233,7 @@
                 </a:tc>
                 <a:tc>
                   <a:txBody>
-                    <a:bodyPr wrap="square"/>
+                    <a:bodyPr/>
                     <a:lstStyle/>
                     <a:p>
                       <a:pPr algn="l"/>
@@ -6258,7 +6258,7 @@
               <a:tr h="457200">
                 <a:tc>
                   <a:txBody>
-                    <a:bodyPr wrap="square"/>
+                    <a:bodyPr/>
                     <a:lstStyle/>
                     <a:p>
                       <a:pPr algn="l"/>
@@ -6281,7 +6281,7 @@
                 </a:tc>
                 <a:tc>
                   <a:txBody>
-                    <a:bodyPr wrap="square"/>
+                    <a:bodyPr/>
                     <a:lstStyle/>
                     <a:p>
                       <a:pPr algn="l"/>
@@ -6304,7 +6304,7 @@
                 </a:tc>
                 <a:tc>
                   <a:txBody>
-                    <a:bodyPr wrap="square"/>
+                    <a:bodyPr/>
                     <a:lstStyle/>
                     <a:p>
                       <a:pPr algn="l"/>
@@ -6327,7 +6327,7 @@
                 </a:tc>
                 <a:tc>
                   <a:txBody>
-                    <a:bodyPr wrap="square"/>
+                    <a:bodyPr/>
                     <a:lstStyle/>
                     <a:p>
                       <a:pPr algn="l"/>
@@ -6350,7 +6350,7 @@
                 </a:tc>
                 <a:tc>
                   <a:txBody>
-                    <a:bodyPr wrap="square"/>
+                    <a:bodyPr/>
                     <a:lstStyle/>
                     <a:p>
                       <a:pPr algn="l"/>
@@ -6373,7 +6373,7 @@
                 </a:tc>
                 <a:tc>
                   <a:txBody>
-                    <a:bodyPr wrap="square"/>
+                    <a:bodyPr/>
                     <a:lstStyle/>
                     <a:p>
                       <a:pPr algn="l"/>
@@ -6398,7 +6398,7 @@
               <a:tr h="457200">
                 <a:tc>
                   <a:txBody>
-                    <a:bodyPr wrap="square"/>
+                    <a:bodyPr/>
                     <a:lstStyle/>
                     <a:p>
                       <a:pPr algn="l"/>
@@ -6421,7 +6421,7 @@
                 </a:tc>
                 <a:tc>
                   <a:txBody>
-                    <a:bodyPr wrap="square"/>
+                    <a:bodyPr/>
                     <a:lstStyle/>
                     <a:p>
                       <a:pPr algn="l"/>
@@ -6444,7 +6444,7 @@
                 </a:tc>
                 <a:tc>
                   <a:txBody>
-                    <a:bodyPr wrap="square"/>
+                    <a:bodyPr/>
                     <a:lstStyle/>
                     <a:p>
                       <a:pPr algn="l"/>
@@ -6467,7 +6467,7 @@
                 </a:tc>
                 <a:tc>
                   <a:txBody>
-                    <a:bodyPr wrap="square"/>
+                    <a:bodyPr/>
                     <a:lstStyle/>
                     <a:p>
                       <a:pPr algn="l"/>
@@ -6490,7 +6490,7 @@
                 </a:tc>
                 <a:tc>
                   <a:txBody>
-                    <a:bodyPr wrap="square"/>
+                    <a:bodyPr/>
                     <a:lstStyle/>
                     <a:p>
                       <a:pPr algn="l"/>
@@ -6513,7 +6513,7 @@
                 </a:tc>
                 <a:tc>
                   <a:txBody>
-                    <a:bodyPr wrap="square"/>
+                    <a:bodyPr/>
                     <a:lstStyle/>
                     <a:p>
                       <a:pPr algn="l"/>
@@ -6538,7 +6538,7 @@
               <a:tr h="457200">
                 <a:tc>
                   <a:txBody>
-                    <a:bodyPr wrap="square"/>
+                    <a:bodyPr/>
                     <a:lstStyle/>
                     <a:p>
                       <a:pPr algn="l"/>
@@ -6561,7 +6561,7 @@
                 </a:tc>
                 <a:tc>
                   <a:txBody>
-                    <a:bodyPr wrap="square"/>
+                    <a:bodyPr/>
                     <a:lstStyle/>
                     <a:p>
                       <a:pPr algn="l"/>
@@ -6584,7 +6584,7 @@
                 </a:tc>
                 <a:tc>
                   <a:txBody>
-                    <a:bodyPr wrap="square"/>
+                    <a:bodyPr/>
                     <a:lstStyle/>
                     <a:p>
                       <a:pPr algn="l"/>
@@ -6607,7 +6607,7 @@
                 </a:tc>
                 <a:tc>
                   <a:txBody>
-                    <a:bodyPr wrap="square"/>
+                    <a:bodyPr/>
                     <a:lstStyle/>
                     <a:p>
                       <a:pPr algn="l"/>
@@ -6630,7 +6630,7 @@
                 </a:tc>
                 <a:tc>
                   <a:txBody>
-                    <a:bodyPr wrap="square"/>
+                    <a:bodyPr/>
                     <a:lstStyle/>
                     <a:p>
                       <a:pPr algn="l"/>
@@ -6653,7 +6653,7 @@
                 </a:tc>
                 <a:tc>
                   <a:txBody>
-                    <a:bodyPr wrap="square"/>
+                    <a:bodyPr/>
                     <a:lstStyle/>
                     <a:p>
                       <a:pPr algn="l"/>
@@ -6678,7 +6678,7 @@
               <a:tr h="457200">
                 <a:tc>
                   <a:txBody>
-                    <a:bodyPr wrap="square"/>
+                    <a:bodyPr/>
                     <a:lstStyle/>
                     <a:p>
                       <a:pPr algn="l"/>
@@ -6701,7 +6701,7 @@
                 </a:tc>
                 <a:tc>
                   <a:txBody>
-                    <a:bodyPr wrap="square"/>
+                    <a:bodyPr/>
                     <a:lstStyle/>
                     <a:p>
                       <a:pPr algn="l"/>
@@ -6724,7 +6724,7 @@
                 </a:tc>
                 <a:tc>
                   <a:txBody>
-                    <a:bodyPr wrap="square"/>
+                    <a:bodyPr/>
                     <a:lstStyle/>
                     <a:p>
                       <a:pPr algn="l"/>
@@ -6747,7 +6747,7 @@
                 </a:tc>
                 <a:tc>
                   <a:txBody>
-                    <a:bodyPr wrap="square"/>
+                    <a:bodyPr/>
                     <a:lstStyle/>
                     <a:p>
                       <a:pPr algn="l"/>
@@ -6770,7 +6770,7 @@
                 </a:tc>
                 <a:tc>
                   <a:txBody>
-                    <a:bodyPr wrap="square"/>
+                    <a:bodyPr/>
                     <a:lstStyle/>
                     <a:p>
                       <a:pPr algn="l"/>
@@ -6793,7 +6793,7 @@
                 </a:tc>
                 <a:tc>
                   <a:txBody>
-                    <a:bodyPr wrap="square"/>
+                    <a:bodyPr/>
                     <a:lstStyle/>
                     <a:p>
                       <a:pPr algn="l"/>
@@ -6818,7 +6818,7 @@
               <a:tr h="457200">
                 <a:tc>
                   <a:txBody>
-                    <a:bodyPr wrap="square"/>
+                    <a:bodyPr/>
                     <a:lstStyle/>
                     <a:p>
                       <a:pPr algn="l"/>
@@ -6841,7 +6841,7 @@
                 </a:tc>
                 <a:tc>
                   <a:txBody>
-                    <a:bodyPr wrap="square"/>
+                    <a:bodyPr/>
                     <a:lstStyle/>
                     <a:p>
                       <a:pPr algn="l"/>
@@ -6864,7 +6864,7 @@
                 </a:tc>
                 <a:tc>
                   <a:txBody>
-                    <a:bodyPr wrap="square"/>
+                    <a:bodyPr/>
                     <a:lstStyle/>
                     <a:p>
                       <a:pPr algn="l"/>
@@ -6887,7 +6887,7 @@
                 </a:tc>
                 <a:tc>
                   <a:txBody>
-                    <a:bodyPr wrap="square"/>
+                    <a:bodyPr/>
                     <a:lstStyle/>
                     <a:p>
                       <a:pPr algn="l"/>
@@ -6910,7 +6910,7 @@
                 </a:tc>
                 <a:tc>
                   <a:txBody>
-                    <a:bodyPr wrap="square"/>
+                    <a:bodyPr/>
                     <a:lstStyle/>
                     <a:p>
                       <a:pPr algn="l"/>
@@ -6933,7 +6933,7 @@
                 </a:tc>
                 <a:tc>
                   <a:txBody>
-                    <a:bodyPr wrap="square"/>
+                    <a:bodyPr/>
                     <a:lstStyle/>
                     <a:p>
                       <a:pPr algn="l"/>
@@ -6958,7 +6958,7 @@
               <a:tr h="457200">
                 <a:tc>
                   <a:txBody>
-                    <a:bodyPr wrap="square"/>
+                    <a:bodyPr/>
                     <a:lstStyle/>
                     <a:p>
                       <a:pPr algn="l"/>
@@ -6981,7 +6981,7 @@
                 </a:tc>
                 <a:tc>
                   <a:txBody>
-                    <a:bodyPr wrap="square"/>
+                    <a:bodyPr/>
                     <a:lstStyle/>
                     <a:p>
                       <a:pPr algn="l"/>
@@ -7004,7 +7004,7 @@
                 </a:tc>
                 <a:tc>
                   <a:txBody>
-                    <a:bodyPr wrap="square"/>
+                    <a:bodyPr/>
                     <a:lstStyle/>
                     <a:p>
                       <a:pPr algn="l"/>
@@ -7027,7 +7027,7 @@
                 </a:tc>
                 <a:tc>
                   <a:txBody>
-                    <a:bodyPr wrap="square"/>
+                    <a:bodyPr/>
                     <a:lstStyle/>
                     <a:p>
                       <a:pPr algn="l"/>
@@ -7050,7 +7050,7 @@
                 </a:tc>
                 <a:tc>
                   <a:txBody>
-                    <a:bodyPr wrap="square"/>
+                    <a:bodyPr/>
                     <a:lstStyle/>
                     <a:p>
                       <a:pPr algn="l"/>
@@ -7073,7 +7073,7 @@
                 </a:tc>
                 <a:tc>
                   <a:txBody>
-                    <a:bodyPr wrap="square"/>
+                    <a:bodyPr/>
                     <a:lstStyle/>
                     <a:p>
                       <a:pPr algn="l"/>
@@ -7257,7 +7257,7 @@
               <a:tr h="292608">
                 <a:tc>
                   <a:txBody>
-                    <a:bodyPr wrap="square"/>
+                    <a:bodyPr/>
                     <a:lstStyle/>
                     <a:p>
                       <a:pPr algn="ctr"/>
@@ -7280,7 +7280,7 @@
                 </a:tc>
                 <a:tc>
                   <a:txBody>
-                    <a:bodyPr wrap="square"/>
+                    <a:bodyPr/>
                     <a:lstStyle/>
                     <a:p>
                       <a:pPr algn="ctr"/>
@@ -7303,7 +7303,7 @@
                 </a:tc>
                 <a:tc>
                   <a:txBody>
-                    <a:bodyPr wrap="square"/>
+                    <a:bodyPr/>
                     <a:lstStyle/>
                     <a:p>
                       <a:pPr algn="ctr"/>
@@ -7326,7 +7326,7 @@
                 </a:tc>
                 <a:tc>
                   <a:txBody>
-                    <a:bodyPr wrap="square"/>
+                    <a:bodyPr/>
                     <a:lstStyle/>
                     <a:p>
                       <a:pPr algn="ctr"/>
@@ -7349,7 +7349,7 @@
                 </a:tc>
                 <a:tc>
                   <a:txBody>
-                    <a:bodyPr wrap="square"/>
+                    <a:bodyPr/>
                     <a:lstStyle/>
                     <a:p>
                       <a:pPr algn="ctr"/>
@@ -7372,7 +7372,7 @@
                 </a:tc>
                 <a:tc>
                   <a:txBody>
-                    <a:bodyPr wrap="square"/>
+                    <a:bodyPr/>
                     <a:lstStyle/>
                     <a:p>
                       <a:pPr algn="ctr"/>
@@ -7395,7 +7395,7 @@
                 </a:tc>
                 <a:tc>
                   <a:txBody>
-                    <a:bodyPr wrap="square"/>
+                    <a:bodyPr/>
                     <a:lstStyle/>
                     <a:p>
                       <a:pPr algn="ctr"/>
@@ -7420,7 +7420,7 @@
               <a:tr h="292608">
                 <a:tc>
                   <a:txBody>
-                    <a:bodyPr wrap="square"/>
+                    <a:bodyPr/>
                     <a:lstStyle/>
                     <a:p>
                       <a:pPr algn="l"/>
@@ -7443,7 +7443,7 @@
                 </a:tc>
                 <a:tc>
                   <a:txBody>
-                    <a:bodyPr wrap="square"/>
+                    <a:bodyPr/>
                     <a:lstStyle/>
                     <a:p>
                       <a:pPr algn="l"/>
@@ -7466,7 +7466,7 @@
                 </a:tc>
                 <a:tc>
                   <a:txBody>
-                    <a:bodyPr wrap="square"/>
+                    <a:bodyPr/>
                     <a:lstStyle/>
                     <a:p>
                       <a:pPr algn="l"/>
@@ -7489,7 +7489,7 @@
                 </a:tc>
                 <a:tc>
                   <a:txBody>
-                    <a:bodyPr wrap="square"/>
+                    <a:bodyPr/>
                     <a:lstStyle/>
                     <a:p>
                       <a:pPr algn="l"/>
@@ -7512,7 +7512,7 @@
                 </a:tc>
                 <a:tc>
                   <a:txBody>
-                    <a:bodyPr wrap="square"/>
+                    <a:bodyPr/>
                     <a:lstStyle/>
                     <a:p>
                       <a:pPr algn="l"/>
@@ -7535,7 +7535,7 @@
                 </a:tc>
                 <a:tc>
                   <a:txBody>
-                    <a:bodyPr wrap="square"/>
+                    <a:bodyPr/>
                     <a:lstStyle/>
                     <a:p>
                       <a:pPr algn="l"/>
@@ -7558,7 +7558,7 @@
                 </a:tc>
                 <a:tc>
                   <a:txBody>
-                    <a:bodyPr wrap="square"/>
+                    <a:bodyPr/>
                     <a:lstStyle/>
                     <a:p>
                       <a:pPr algn="l"/>
@@ -7583,7 +7583,7 @@
               <a:tr h="292608">
                 <a:tc>
                   <a:txBody>
-                    <a:bodyPr wrap="square"/>
+                    <a:bodyPr/>
                     <a:lstStyle/>
                     <a:p>
                       <a:pPr algn="l"/>
@@ -7606,7 +7606,7 @@
                 </a:tc>
                 <a:tc>
                   <a:txBody>
-                    <a:bodyPr wrap="square"/>
+                    <a:bodyPr/>
                     <a:lstStyle/>
                     <a:p>
                       <a:pPr algn="l"/>
@@ -7629,7 +7629,7 @@
                 </a:tc>
                 <a:tc>
                   <a:txBody>
-                    <a:bodyPr wrap="square"/>
+                    <a:bodyPr/>
                     <a:lstStyle/>
                     <a:p>
                       <a:pPr algn="l"/>
@@ -7652,7 +7652,7 @@
                 </a:tc>
                 <a:tc>
                   <a:txBody>
-                    <a:bodyPr wrap="square"/>
+                    <a:bodyPr/>
                     <a:lstStyle/>
                     <a:p>
                       <a:pPr algn="l"/>
@@ -7675,7 +7675,7 @@
                 </a:tc>
                 <a:tc>
                   <a:txBody>
-                    <a:bodyPr wrap="square"/>
+                    <a:bodyPr/>
                     <a:lstStyle/>
                     <a:p>
                       <a:pPr algn="l"/>
@@ -7698,7 +7698,7 @@
                 </a:tc>
                 <a:tc>
                   <a:txBody>
-                    <a:bodyPr wrap="square"/>
+                    <a:bodyPr/>
                     <a:lstStyle/>
                     <a:p>
                       <a:pPr algn="l"/>
@@ -7721,7 +7721,7 @@
                 </a:tc>
                 <a:tc>
                   <a:txBody>
-                    <a:bodyPr wrap="square"/>
+                    <a:bodyPr/>
                     <a:lstStyle/>
                     <a:p>
                       <a:pPr algn="l"/>
@@ -7746,7 +7746,7 @@
               <a:tr h="292608">
                 <a:tc>
                   <a:txBody>
-                    <a:bodyPr wrap="square"/>
+                    <a:bodyPr/>
                     <a:lstStyle/>
                     <a:p>
                       <a:pPr algn="l"/>
@@ -7769,7 +7769,7 @@
                 </a:tc>
                 <a:tc>
                   <a:txBody>
-                    <a:bodyPr wrap="square"/>
+                    <a:bodyPr/>
                     <a:lstStyle/>
                     <a:p>
                       <a:pPr algn="l"/>
@@ -7792,7 +7792,7 @@
                 </a:tc>
                 <a:tc>
                   <a:txBody>
-                    <a:bodyPr wrap="square"/>
+                    <a:bodyPr/>
                     <a:lstStyle/>
                     <a:p>
                       <a:pPr algn="l"/>
@@ -7815,7 +7815,7 @@
                 </a:tc>
                 <a:tc>
                   <a:txBody>
-                    <a:bodyPr wrap="square"/>
+                    <a:bodyPr/>
                     <a:lstStyle/>
                     <a:p>
                       <a:pPr algn="l"/>
@@ -7838,7 +7838,7 @@
                 </a:tc>
                 <a:tc>
                   <a:txBody>
-                    <a:bodyPr wrap="square"/>
+                    <a:bodyPr/>
                     <a:lstStyle/>
                     <a:p>
                       <a:pPr algn="l"/>
@@ -7861,7 +7861,7 @@
                 </a:tc>
                 <a:tc>
                   <a:txBody>
-                    <a:bodyPr wrap="square"/>
+                    <a:bodyPr/>
                     <a:lstStyle/>
                     <a:p>
                       <a:pPr algn="l"/>
@@ -7884,7 +7884,7 @@
                 </a:tc>
                 <a:tc>
                   <a:txBody>
-                    <a:bodyPr wrap="square"/>
+                    <a:bodyPr/>
                     <a:lstStyle/>
                     <a:p>
                       <a:pPr algn="l"/>
@@ -7909,7 +7909,7 @@
               <a:tr h="292608">
                 <a:tc>
                   <a:txBody>
-                    <a:bodyPr wrap="square"/>
+                    <a:bodyPr/>
                     <a:lstStyle/>
                     <a:p>
                       <a:pPr algn="l"/>
@@ -7932,7 +7932,7 @@
                 </a:tc>
                 <a:tc>
                   <a:txBody>
-                    <a:bodyPr wrap="square"/>
+                    <a:bodyPr/>
                     <a:lstStyle/>
                     <a:p>
                       <a:pPr algn="l"/>
@@ -7955,7 +7955,7 @@
                 </a:tc>
                 <a:tc>
                   <a:txBody>
-                    <a:bodyPr wrap="square"/>
+                    <a:bodyPr/>
                     <a:lstStyle/>
                     <a:p>
                       <a:pPr algn="l"/>
@@ -7978,7 +7978,7 @@
                 </a:tc>
                 <a:tc>
                   <a:txBody>
-                    <a:bodyPr wrap="square"/>
+                    <a:bodyPr/>
                     <a:lstStyle/>
                     <a:p>
                       <a:pPr algn="l"/>
@@ -8001,7 +8001,7 @@
                 </a:tc>
                 <a:tc>
                   <a:txBody>
-                    <a:bodyPr wrap="square"/>
+                    <a:bodyPr/>
                     <a:lstStyle/>
                     <a:p>
                       <a:pPr algn="l"/>
@@ -8024,7 +8024,7 @@
                 </a:tc>
                 <a:tc>
                   <a:txBody>
-                    <a:bodyPr wrap="square"/>
+                    <a:bodyPr/>
                     <a:lstStyle/>
                     <a:p>
                       <a:pPr algn="l"/>
@@ -8047,7 +8047,7 @@
                 </a:tc>
                 <a:tc>
                   <a:txBody>
-                    <a:bodyPr wrap="square"/>
+                    <a:bodyPr/>
                     <a:lstStyle/>
                     <a:p>
                       <a:pPr algn="l"/>
@@ -8072,7 +8072,7 @@
               <a:tr h="292608">
                 <a:tc>
                   <a:txBody>
-                    <a:bodyPr wrap="square"/>
+                    <a:bodyPr/>
                     <a:lstStyle/>
                     <a:p>
                       <a:pPr algn="l"/>
@@ -8095,7 +8095,7 @@
                 </a:tc>
                 <a:tc>
                   <a:txBody>
-                    <a:bodyPr wrap="square"/>
+                    <a:bodyPr/>
                     <a:lstStyle/>
                     <a:p>
                       <a:pPr algn="l"/>
@@ -8118,7 +8118,7 @@
                 </a:tc>
                 <a:tc>
                   <a:txBody>
-                    <a:bodyPr wrap="square"/>
+                    <a:bodyPr/>
                     <a:lstStyle/>
                     <a:p>
                       <a:pPr algn="l"/>
@@ -8141,7 +8141,7 @@
                 </a:tc>
                 <a:tc>
                   <a:txBody>
-                    <a:bodyPr wrap="square"/>
+                    <a:bodyPr/>
                     <a:lstStyle/>
                     <a:p>
                       <a:pPr algn="l"/>
@@ -8164,7 +8164,7 @@
                 </a:tc>
                 <a:tc>
                   <a:txBody>
-                    <a:bodyPr wrap="square"/>
+                    <a:bodyPr/>
                     <a:lstStyle/>
                     <a:p>
                       <a:pPr algn="l"/>
@@ -8187,7 +8187,7 @@
                 </a:tc>
                 <a:tc>
                   <a:txBody>
-                    <a:bodyPr wrap="square"/>
+                    <a:bodyPr/>
                     <a:lstStyle/>
                     <a:p>
                       <a:pPr algn="l"/>
@@ -8210,7 +8210,7 @@
                 </a:tc>
                 <a:tc>
                   <a:txBody>
-                    <a:bodyPr wrap="square"/>
+                    <a:bodyPr/>
                     <a:lstStyle/>
                     <a:p>
                       <a:pPr algn="l"/>
@@ -8235,7 +8235,7 @@
               <a:tr h="292608">
                 <a:tc>
                   <a:txBody>
-                    <a:bodyPr wrap="square"/>
+                    <a:bodyPr/>
                     <a:lstStyle/>
                     <a:p>
                       <a:pPr algn="l"/>
@@ -8258,7 +8258,7 @@
                 </a:tc>
                 <a:tc>
                   <a:txBody>
-                    <a:bodyPr wrap="square"/>
+                    <a:bodyPr/>
                     <a:lstStyle/>
                     <a:p>
                       <a:pPr algn="l"/>
@@ -8281,7 +8281,7 @@
                 </a:tc>
                 <a:tc>
                   <a:txBody>
-                    <a:bodyPr wrap="square"/>
+                    <a:bodyPr/>
                     <a:lstStyle/>
                     <a:p>
                       <a:pPr algn="l"/>
@@ -8304,7 +8304,7 @@
                 </a:tc>
                 <a:tc>
                   <a:txBody>
-                    <a:bodyPr wrap="square"/>
+                    <a:bodyPr/>
                     <a:lstStyle/>
                     <a:p>
                       <a:pPr algn="l"/>
@@ -8327,7 +8327,7 @@
                 </a:tc>
                 <a:tc>
                   <a:txBody>
-                    <a:bodyPr wrap="square"/>
+                    <a:bodyPr/>
                     <a:lstStyle/>
                     <a:p>
                       <a:pPr algn="l"/>
@@ -8350,7 +8350,7 @@
                 </a:tc>
                 <a:tc>
                   <a:txBody>
-                    <a:bodyPr wrap="square"/>
+                    <a:bodyPr/>
                     <a:lstStyle/>
                     <a:p>
                       <a:pPr algn="l"/>
@@ -8373,7 +8373,7 @@
                 </a:tc>
                 <a:tc>
                   <a:txBody>
-                    <a:bodyPr wrap="square"/>
+                    <a:bodyPr/>
                     <a:lstStyle/>
                     <a:p>
                       <a:pPr algn="l"/>
@@ -8398,7 +8398,7 @@
               <a:tr h="292608">
                 <a:tc>
                   <a:txBody>
-                    <a:bodyPr wrap="square"/>
+                    <a:bodyPr/>
                     <a:lstStyle/>
                     <a:p>
                       <a:pPr algn="l"/>
@@ -8421,7 +8421,7 @@
                 </a:tc>
                 <a:tc>
                   <a:txBody>
-                    <a:bodyPr wrap="square"/>
+                    <a:bodyPr/>
                     <a:lstStyle/>
                     <a:p>
                       <a:pPr algn="l"/>
@@ -8444,7 +8444,7 @@
                 </a:tc>
                 <a:tc>
                   <a:txBody>
-                    <a:bodyPr wrap="square"/>
+                    <a:bodyPr/>
                     <a:lstStyle/>
                     <a:p>
                       <a:pPr algn="l"/>
@@ -8467,7 +8467,7 @@
                 </a:tc>
                 <a:tc>
                   <a:txBody>
-                    <a:bodyPr wrap="square"/>
+                    <a:bodyPr/>
                     <a:lstStyle/>
                     <a:p>
                       <a:pPr algn="l"/>
@@ -8490,7 +8490,7 @@
                 </a:tc>
                 <a:tc>
                   <a:txBody>
-                    <a:bodyPr wrap="square"/>
+                    <a:bodyPr/>
                     <a:lstStyle/>
                     <a:p>
                       <a:pPr algn="l"/>
@@ -8513,7 +8513,7 @@
                 </a:tc>
                 <a:tc>
                   <a:txBody>
-                    <a:bodyPr wrap="square"/>
+                    <a:bodyPr/>
                     <a:lstStyle/>
                     <a:p>
                       <a:pPr algn="l"/>
@@ -8536,7 +8536,7 @@
                 </a:tc>
                 <a:tc>
                   <a:txBody>
-                    <a:bodyPr wrap="square"/>
+                    <a:bodyPr/>
                     <a:lstStyle/>
                     <a:p>
                       <a:pPr algn="l"/>
@@ -8561,7 +8561,7 @@
               <a:tr h="292608">
                 <a:tc>
                   <a:txBody>
-                    <a:bodyPr wrap="square"/>
+                    <a:bodyPr/>
                     <a:lstStyle/>
                     <a:p>
                       <a:pPr algn="l"/>
@@ -8584,7 +8584,7 @@
                 </a:tc>
                 <a:tc>
                   <a:txBody>
-                    <a:bodyPr wrap="square"/>
+                    <a:bodyPr/>
                     <a:lstStyle/>
                     <a:p>
                       <a:pPr algn="l"/>
@@ -8607,7 +8607,7 @@
                 </a:tc>
                 <a:tc>
                   <a:txBody>
-                    <a:bodyPr wrap="square"/>
+                    <a:bodyPr/>
                     <a:lstStyle/>
                     <a:p>
                       <a:pPr algn="l"/>
@@ -8630,7 +8630,7 @@
                 </a:tc>
                 <a:tc>
                   <a:txBody>
-                    <a:bodyPr wrap="square"/>
+                    <a:bodyPr/>
                     <a:lstStyle/>
                     <a:p>
                       <a:pPr algn="l"/>
@@ -8653,7 +8653,7 @@
                 </a:tc>
                 <a:tc>
                   <a:txBody>
-                    <a:bodyPr wrap="square"/>
+                    <a:bodyPr/>
                     <a:lstStyle/>
                     <a:p>
                       <a:pPr algn="l"/>
@@ -8676,7 +8676,7 @@
                 </a:tc>
                 <a:tc>
                   <a:txBody>
-                    <a:bodyPr wrap="square"/>
+                    <a:bodyPr/>
                     <a:lstStyle/>
                     <a:p>
                       <a:pPr algn="l"/>
@@ -8699,7 +8699,7 @@
                 </a:tc>
                 <a:tc>
                   <a:txBody>
-                    <a:bodyPr wrap="square"/>
+                    <a:bodyPr/>
                     <a:lstStyle/>
                     <a:p>
                       <a:pPr algn="l"/>
@@ -8724,7 +8724,7 @@
               <a:tr h="292608">
                 <a:tc>
                   <a:txBody>
-                    <a:bodyPr wrap="square"/>
+                    <a:bodyPr/>
                     <a:lstStyle/>
                     <a:p>
                       <a:pPr algn="l"/>
@@ -8747,7 +8747,7 @@
                 </a:tc>
                 <a:tc>
                   <a:txBody>
-                    <a:bodyPr wrap="square"/>
+                    <a:bodyPr/>
                     <a:lstStyle/>
                     <a:p>
                       <a:pPr algn="l"/>
@@ -8770,7 +8770,7 @@
                 </a:tc>
                 <a:tc>
                   <a:txBody>
-                    <a:bodyPr wrap="square"/>
+                    <a:bodyPr/>
                     <a:lstStyle/>
                     <a:p>
                       <a:pPr algn="l"/>
@@ -8793,7 +8793,7 @@
                 </a:tc>
                 <a:tc>
                   <a:txBody>
-                    <a:bodyPr wrap="square"/>
+                    <a:bodyPr/>
                     <a:lstStyle/>
                     <a:p>
                       <a:pPr algn="l"/>
@@ -8816,7 +8816,7 @@
                 </a:tc>
                 <a:tc>
                   <a:txBody>
-                    <a:bodyPr wrap="square"/>
+                    <a:bodyPr/>
                     <a:lstStyle/>
                     <a:p>
                       <a:pPr algn="l"/>
@@ -8839,7 +8839,7 @@
                 </a:tc>
                 <a:tc>
                   <a:txBody>
-                    <a:bodyPr wrap="square"/>
+                    <a:bodyPr/>
                     <a:lstStyle/>
                     <a:p>
                       <a:pPr algn="l"/>
@@ -8862,7 +8862,7 @@
                 </a:tc>
                 <a:tc>
                   <a:txBody>
-                    <a:bodyPr wrap="square"/>
+                    <a:bodyPr/>
                     <a:lstStyle/>
                     <a:p>
                       <a:pPr algn="l"/>
@@ -8887,7 +8887,7 @@
               <a:tr h="292608">
                 <a:tc>
                   <a:txBody>
-                    <a:bodyPr wrap="square"/>
+                    <a:bodyPr/>
                     <a:lstStyle/>
                     <a:p>
                       <a:pPr algn="l"/>
@@ -8910,7 +8910,7 @@
                 </a:tc>
                 <a:tc>
                   <a:txBody>
-                    <a:bodyPr wrap="square"/>
+                    <a:bodyPr/>
                     <a:lstStyle/>
                     <a:p>
                       <a:pPr algn="l"/>
@@ -8933,7 +8933,7 @@
                 </a:tc>
                 <a:tc>
                   <a:txBody>
-                    <a:bodyPr wrap="square"/>
+                    <a:bodyPr/>
                     <a:lstStyle/>
                     <a:p>
                       <a:pPr algn="l"/>
@@ -8956,7 +8956,7 @@
                 </a:tc>
                 <a:tc>
                   <a:txBody>
-                    <a:bodyPr wrap="square"/>
+                    <a:bodyPr/>
                     <a:lstStyle/>
                     <a:p>
                       <a:pPr algn="l"/>
@@ -8979,7 +8979,7 @@
                 </a:tc>
                 <a:tc>
                   <a:txBody>
-                    <a:bodyPr wrap="square"/>
+                    <a:bodyPr/>
                     <a:lstStyle/>
                     <a:p>
                       <a:pPr algn="l"/>
@@ -9002,7 +9002,7 @@
                 </a:tc>
                 <a:tc>
                   <a:txBody>
-                    <a:bodyPr wrap="square"/>
+                    <a:bodyPr/>
                     <a:lstStyle/>
                     <a:p>
                       <a:pPr algn="l"/>
@@ -9025,7 +9025,7 @@
                 </a:tc>
                 <a:tc>
                   <a:txBody>
-                    <a:bodyPr wrap="square"/>
+                    <a:bodyPr/>
                     <a:lstStyle/>
                     <a:p>
                       <a:pPr algn="l"/>
@@ -9050,7 +9050,7 @@
               <a:tr h="292608">
                 <a:tc>
                   <a:txBody>
-                    <a:bodyPr wrap="square"/>
+                    <a:bodyPr/>
                     <a:lstStyle/>
                     <a:p>
                       <a:pPr algn="l"/>
@@ -9073,7 +9073,7 @@
                 </a:tc>
                 <a:tc>
                   <a:txBody>
-                    <a:bodyPr wrap="square"/>
+                    <a:bodyPr/>
                     <a:lstStyle/>
                     <a:p>
                       <a:pPr algn="l"/>
@@ -9096,7 +9096,7 @@
                 </a:tc>
                 <a:tc>
                   <a:txBody>
-                    <a:bodyPr wrap="square"/>
+                    <a:bodyPr/>
                     <a:lstStyle/>
                     <a:p>
                       <a:pPr algn="l"/>
@@ -9119,7 +9119,7 @@
                 </a:tc>
                 <a:tc>
                   <a:txBody>
-                    <a:bodyPr wrap="square"/>
+                    <a:bodyPr/>
                     <a:lstStyle/>
                     <a:p>
                       <a:pPr algn="l"/>
@@ -9142,7 +9142,7 @@
                 </a:tc>
                 <a:tc>
                   <a:txBody>
-                    <a:bodyPr wrap="square"/>
+                    <a:bodyPr/>
                     <a:lstStyle/>
                     <a:p>
                       <a:pPr algn="l"/>
@@ -9165,7 +9165,7 @@
                 </a:tc>
                 <a:tc>
                   <a:txBody>
-                    <a:bodyPr wrap="square"/>
+                    <a:bodyPr/>
                     <a:lstStyle/>
                     <a:p>
                       <a:pPr algn="l"/>
@@ -9188,7 +9188,7 @@
                 </a:tc>
                 <a:tc>
                   <a:txBody>
-                    <a:bodyPr wrap="square"/>
+                    <a:bodyPr/>
                     <a:lstStyle/>
                     <a:p>
                       <a:pPr algn="l"/>
@@ -9213,7 +9213,7 @@
               <a:tr h="292608">
                 <a:tc>
                   <a:txBody>
-                    <a:bodyPr wrap="square"/>
+                    <a:bodyPr/>
                     <a:lstStyle/>
                     <a:p>
                       <a:pPr algn="l"/>
@@ -9236,7 +9236,7 @@
                 </a:tc>
                 <a:tc>
                   <a:txBody>
-                    <a:bodyPr wrap="square"/>
+                    <a:bodyPr/>
                     <a:lstStyle/>
                     <a:p>
                       <a:pPr algn="l"/>
@@ -9259,7 +9259,7 @@
                 </a:tc>
                 <a:tc>
                   <a:txBody>
-                    <a:bodyPr wrap="square"/>
+                    <a:bodyPr/>
                     <a:lstStyle/>
                     <a:p>
                       <a:pPr algn="l"/>
@@ -9282,7 +9282,7 @@
                 </a:tc>
                 <a:tc>
                   <a:txBody>
-                    <a:bodyPr wrap="square"/>
+                    <a:bodyPr/>
                     <a:lstStyle/>
                     <a:p>
                       <a:pPr algn="l"/>
@@ -9305,7 +9305,7 @@
                 </a:tc>
                 <a:tc>
                   <a:txBody>
-                    <a:bodyPr wrap="square"/>
+                    <a:bodyPr/>
                     <a:lstStyle/>
                     <a:p>
                       <a:pPr algn="l"/>
@@ -9328,7 +9328,7 @@
                 </a:tc>
                 <a:tc>
                   <a:txBody>
-                    <a:bodyPr wrap="square"/>
+                    <a:bodyPr/>
                     <a:lstStyle/>
                     <a:p>
                       <a:pPr algn="l"/>
@@ -9351,7 +9351,7 @@
                 </a:tc>
                 <a:tc>
                   <a:txBody>
-                    <a:bodyPr wrap="square"/>
+                    <a:bodyPr/>
                     <a:lstStyle/>
                     <a:p>
                       <a:pPr algn="l"/>
@@ -9376,7 +9376,7 @@
               <a:tr h="292608">
                 <a:tc>
                   <a:txBody>
-                    <a:bodyPr wrap="square"/>
+                    <a:bodyPr/>
                     <a:lstStyle/>
                     <a:p>
                       <a:pPr algn="l"/>
@@ -9399,7 +9399,7 @@
                 </a:tc>
                 <a:tc>
                   <a:txBody>
-                    <a:bodyPr wrap="square"/>
+                    <a:bodyPr/>
                     <a:lstStyle/>
                     <a:p>
                       <a:pPr algn="l"/>
@@ -9422,7 +9422,7 @@
                 </a:tc>
                 <a:tc>
                   <a:txBody>
-                    <a:bodyPr wrap="square"/>
+                    <a:bodyPr/>
                     <a:lstStyle/>
                     <a:p>
                       <a:pPr algn="l"/>
@@ -9445,7 +9445,7 @@
                 </a:tc>
                 <a:tc>
                   <a:txBody>
-                    <a:bodyPr wrap="square"/>
+                    <a:bodyPr/>
                     <a:lstStyle/>
                     <a:p>
                       <a:pPr algn="l"/>
@@ -9468,7 +9468,7 @@
                 </a:tc>
                 <a:tc>
                   <a:txBody>
-                    <a:bodyPr wrap="square"/>
+                    <a:bodyPr/>
                     <a:lstStyle/>
                     <a:p>
                       <a:pPr algn="l"/>
@@ -9491,7 +9491,7 @@
                 </a:tc>
                 <a:tc>
                   <a:txBody>
-                    <a:bodyPr wrap="square"/>
+                    <a:bodyPr/>
                     <a:lstStyle/>
                     <a:p>
                       <a:pPr algn="l"/>
@@ -9514,7 +9514,7 @@
                 </a:tc>
                 <a:tc>
                   <a:txBody>
-                    <a:bodyPr wrap="square"/>
+                    <a:bodyPr/>
                     <a:lstStyle/>
                     <a:p>
                       <a:pPr algn="l"/>
@@ -9539,7 +9539,7 @@
               <a:tr h="292608">
                 <a:tc>
                   <a:txBody>
-                    <a:bodyPr wrap="square"/>
+                    <a:bodyPr/>
                     <a:lstStyle/>
                     <a:p>
                       <a:pPr algn="l"/>
@@ -9562,7 +9562,7 @@
                 </a:tc>
                 <a:tc>
                   <a:txBody>
-                    <a:bodyPr wrap="square"/>
+                    <a:bodyPr/>
                     <a:lstStyle/>
                     <a:p>
                       <a:pPr algn="l"/>
@@ -9585,7 +9585,7 @@
                 </a:tc>
                 <a:tc>
                   <a:txBody>
-                    <a:bodyPr wrap="square"/>
+                    <a:bodyPr/>
                     <a:lstStyle/>
                     <a:p>
                       <a:pPr algn="l"/>
@@ -9608,7 +9608,7 @@
                 </a:tc>
                 <a:tc>
                   <a:txBody>
-                    <a:bodyPr wrap="square"/>
+                    <a:bodyPr/>
                     <a:lstStyle/>
                     <a:p>
                       <a:pPr algn="l"/>
@@ -9631,7 +9631,7 @@
                 </a:tc>
                 <a:tc>
                   <a:txBody>
-                    <a:bodyPr wrap="square"/>
+                    <a:bodyPr/>
                     <a:lstStyle/>
                     <a:p>
                       <a:pPr algn="l"/>
@@ -9654,7 +9654,7 @@
                 </a:tc>
                 <a:tc>
                   <a:txBody>
-                    <a:bodyPr wrap="square"/>
+                    <a:bodyPr/>
                     <a:lstStyle/>
                     <a:p>
                       <a:pPr algn="l"/>
@@ -9677,7 +9677,7 @@
                 </a:tc>
                 <a:tc>
                   <a:txBody>
-                    <a:bodyPr wrap="square"/>
+                    <a:bodyPr/>
                     <a:lstStyle/>
                     <a:p>
                       <a:pPr algn="l"/>

--- a/SEGER_COMERCIAL_IMPORTADORA_E.pptx
+++ b/SEGER_COMERCIAL_IMPORTADORA_E.pptx
@@ -143,13 +143,10 @@
           </c:spPr>
           <c:cat>
             <c:strRef>
-              <c:f>Sheet1!$A$2:$A$3</c:f>
+              <c:f>Sheet1!$A$2:$A$2</c:f>
               <c:strCache>
-                <c:ptCount val="2"/>
+                <c:ptCount val="1"/>
                 <c:pt idx="0">
-                  <c:v>Marco 2026</c:v>
-                </c:pt>
-                <c:pt idx="1">
                   <c:v>Abril 2026</c:v>
                 </c:pt>
               </c:strCache>
@@ -157,15 +154,12 @@
           </c:cat>
           <c:val>
             <c:numRef>
-              <c:f>Sheet1!$B$2:$B$3</c:f>
+              <c:f>Sheet1!$B$2:$B$2</c:f>
               <c:numCache>
                 <c:formatCode>General</c:formatCode>
-                <c:ptCount val="2"/>
+                <c:ptCount val="1"/>
                 <c:pt idx="0">
-                  <c:v>0</c:v>
-                </c:pt>
-                <c:pt idx="1">
-                  <c:v>33</c:v>
+                  <c:v>34</c:v>
                 </c:pt>
               </c:numCache>
             </c:numRef>
@@ -192,13 +186,10 @@
           </c:spPr>
           <c:cat>
             <c:strRef>
-              <c:f>Sheet1!$A$2:$A$3</c:f>
+              <c:f>Sheet1!$A$2:$A$2</c:f>
               <c:strCache>
-                <c:ptCount val="2"/>
+                <c:ptCount val="1"/>
                 <c:pt idx="0">
-                  <c:v>Marco 2026</c:v>
-                </c:pt>
-                <c:pt idx="1">
                   <c:v>Abril 2026</c:v>
                 </c:pt>
               </c:strCache>
@@ -206,15 +197,12 @@
           </c:cat>
           <c:val>
             <c:numRef>
-              <c:f>Sheet1!$C$2:$C$3</c:f>
+              <c:f>Sheet1!$C$2:$C$2</c:f>
               <c:numCache>
                 <c:formatCode>General</c:formatCode>
-                <c:ptCount val="2"/>
+                <c:ptCount val="1"/>
                 <c:pt idx="0">
-                  <c:v>0</c:v>
-                </c:pt>
-                <c:pt idx="1">
-                  <c:v>3</c:v>
+                  <c:v>2</c:v>
                 </c:pt>
               </c:numCache>
             </c:numRef>
@@ -3494,14 +3482,13 @@
           <a:p>
             <a:pPr algn="ctr"/>
             <a:r>
-              <a:rPr sz="1600" b="1">
+              <a:rPr sz="1400" b="1">
                 <a:solidFill>
                   <a:srgbClr val="FFFFFF"/>
                 </a:solidFill>
                 <a:latin typeface="Calibri"/>
               </a:rPr>
-              <a:t>Nossa rota e ir alem das
-entregas!</a:t>
+              <a:t>Nossa rota e ir alem das entregas!</a:t>
             </a:r>
           </a:p>
         </p:txBody>
@@ -3824,7 +3811,7 @@
                 </a:solidFill>
                 <a:latin typeface="Calibri"/>
               </a:rPr>
-              <a:t>33</a:t>
+              <a:t>34</a:t>
             </a:r>
           </a:p>
         </p:txBody>
@@ -3939,7 +3926,7 @@
                 </a:solidFill>
                 <a:latin typeface="Calibri"/>
               </a:rPr>
-              <a:t>3</a:t>
+              <a:t>2</a:t>
             </a:r>
           </a:p>
         </p:txBody>
@@ -4054,7 +4041,7 @@
                 </a:solidFill>
                 <a:latin typeface="Calibri"/>
               </a:rPr>
-              <a:t>91.7%</a:t>
+              <a:t>94.4%</a:t>
             </a:r>
           </a:p>
         </p:txBody>
@@ -4249,7 +4236,7 @@
                           </a:solidFill>
                           <a:latin typeface="Calibri"/>
                         </a:rPr>
-                        <a:t>0</a:t>
+                        <a:t>-</a:t>
                       </a:r>
                     </a:p>
                   </a:txBody>
@@ -4295,7 +4282,7 @@
                           </a:solidFill>
                           <a:latin typeface="Calibri"/>
                         </a:rPr>
-                        <a:t>+ 36</a:t>
+                        <a:t>-</a:t>
                       </a:r>
                     </a:p>
                   </a:txBody>
@@ -4343,7 +4330,7 @@
                           </a:solidFill>
                           <a:latin typeface="Calibri"/>
                         </a:rPr>
-                        <a:t>0</a:t>
+                        <a:t>-</a:t>
                       </a:r>
                     </a:p>
                   </a:txBody>
@@ -4366,7 +4353,7 @@
                           </a:solidFill>
                           <a:latin typeface="Calibri"/>
                         </a:rPr>
-                        <a:t>33</a:t>
+                        <a:t>34</a:t>
                       </a:r>
                     </a:p>
                   </a:txBody>
@@ -4389,7 +4376,7 @@
                           </a:solidFill>
                           <a:latin typeface="Calibri"/>
                         </a:rPr>
-                        <a:t>+ 33</a:t>
+                        <a:t>-</a:t>
                       </a:r>
                     </a:p>
                   </a:txBody>
@@ -4437,7 +4424,7 @@
                           </a:solidFill>
                           <a:latin typeface="Calibri"/>
                         </a:rPr>
-                        <a:t>0</a:t>
+                        <a:t>-</a:t>
                       </a:r>
                     </a:p>
                   </a:txBody>
@@ -4460,7 +4447,7 @@
                           </a:solidFill>
                           <a:latin typeface="Calibri"/>
                         </a:rPr>
-                        <a:t>3</a:t>
+                        <a:t>2</a:t>
                       </a:r>
                     </a:p>
                   </a:txBody>
@@ -4483,7 +4470,7 @@
                           </a:solidFill>
                           <a:latin typeface="Calibri"/>
                         </a:rPr>
-                        <a:t>+ 3</a:t>
+                        <a:t>-</a:t>
                       </a:r>
                     </a:p>
                   </a:txBody>
@@ -4531,7 +4518,7 @@
                           </a:solidFill>
                           <a:latin typeface="Calibri"/>
                         </a:rPr>
-                        <a:t>91.7%</a:t>
+                        <a:t>-</a:t>
                       </a:r>
                     </a:p>
                   </a:txBody>
@@ -4554,7 +4541,7 @@
                           </a:solidFill>
                           <a:latin typeface="Calibri"/>
                         </a:rPr>
-                        <a:t>91.7%</a:t>
+                        <a:t>94.4%</a:t>
                       </a:r>
                     </a:p>
                   </a:txBody>
@@ -4577,7 +4564,7 @@
                           </a:solidFill>
                           <a:latin typeface="Calibri"/>
                         </a:rPr>
-                        <a:t>+ 0.0pp</a:t>
+                        <a:t>-</a:t>
                       </a:r>
                     </a:p>
                   </a:txBody>
@@ -4748,7 +4735,7 @@
         </p:nvGraphicFramePr>
         <p:xfrm>
           <a:off x="7955279" y="2286000"/>
-          <a:ext cx="4480560" cy="1316736"/>
+          <a:ext cx="4480560" cy="877824"/>
         </p:xfrm>
         <a:graphic>
           <a:graphicData uri="http://schemas.openxmlformats.org/drawingml/2006/table">
@@ -4894,7 +4881,7 @@
                           </a:solidFill>
                           <a:latin typeface="Calibri"/>
                         </a:rPr>
-                        <a:t>Marco 2026</a:t>
+                        <a:t>Abril 2026</a:t>
                       </a:r>
                     </a:p>
                   </a:txBody>
@@ -4917,7 +4904,7 @@
                           </a:solidFill>
                           <a:latin typeface="Calibri"/>
                         </a:rPr>
-                        <a:t>0</a:t>
+                        <a:t>36</a:t>
                       </a:r>
                     </a:p>
                   </a:txBody>
@@ -4940,7 +4927,7 @@
                           </a:solidFill>
                           <a:latin typeface="Calibri"/>
                         </a:rPr>
-                        <a:t>0</a:t>
+                        <a:t>34</a:t>
                       </a:r>
                     </a:p>
                   </a:txBody>
@@ -4963,7 +4950,7 @@
                           </a:solidFill>
                           <a:latin typeface="Calibri"/>
                         </a:rPr>
-                        <a:t>0</a:t>
+                        <a:t>2</a:t>
                       </a:r>
                     </a:p>
                   </a:txBody>
@@ -4986,130 +4973,13 @@
                           </a:solidFill>
                           <a:latin typeface="Calibri"/>
                         </a:rPr>
-                        <a:t>91.7%</a:t>
+                        <a:t>94.4%</a:t>
                       </a:r>
                     </a:p>
                   </a:txBody>
                   <a:tcPr>
                     <a:solidFill>
                       <a:srgbClr val="FFFFFF"/>
-                    </a:solidFill>
-                  </a:tcPr>
-                </a:tc>
-              </a:tr>
-              <a:tr h="438912">
-                <a:tc>
-                  <a:txBody>
-                    <a:bodyPr/>
-                    <a:lstStyle/>
-                    <a:p>
-                      <a:pPr algn="l"/>
-                      <a:r>
-                        <a:rPr sz="1000" b="0">
-                          <a:solidFill>
-                            <a:srgbClr val="1D1B43"/>
-                          </a:solidFill>
-                          <a:latin typeface="Calibri"/>
-                        </a:rPr>
-                        <a:t>Abril 2026</a:t>
-                      </a:r>
-                    </a:p>
-                  </a:txBody>
-                  <a:tcPr>
-                    <a:solidFill>
-                      <a:srgbClr val="F2F2F2"/>
-                    </a:solidFill>
-                  </a:tcPr>
-                </a:tc>
-                <a:tc>
-                  <a:txBody>
-                    <a:bodyPr/>
-                    <a:lstStyle/>
-                    <a:p>
-                      <a:pPr algn="l"/>
-                      <a:r>
-                        <a:rPr sz="1000" b="0">
-                          <a:solidFill>
-                            <a:srgbClr val="1D1B43"/>
-                          </a:solidFill>
-                          <a:latin typeface="Calibri"/>
-                        </a:rPr>
-                        <a:t>36</a:t>
-                      </a:r>
-                    </a:p>
-                  </a:txBody>
-                  <a:tcPr>
-                    <a:solidFill>
-                      <a:srgbClr val="F2F2F2"/>
-                    </a:solidFill>
-                  </a:tcPr>
-                </a:tc>
-                <a:tc>
-                  <a:txBody>
-                    <a:bodyPr/>
-                    <a:lstStyle/>
-                    <a:p>
-                      <a:pPr algn="l"/>
-                      <a:r>
-                        <a:rPr sz="1000" b="0">
-                          <a:solidFill>
-                            <a:srgbClr val="1D1B43"/>
-                          </a:solidFill>
-                          <a:latin typeface="Calibri"/>
-                        </a:rPr>
-                        <a:t>33</a:t>
-                      </a:r>
-                    </a:p>
-                  </a:txBody>
-                  <a:tcPr>
-                    <a:solidFill>
-                      <a:srgbClr val="F2F2F2"/>
-                    </a:solidFill>
-                  </a:tcPr>
-                </a:tc>
-                <a:tc>
-                  <a:txBody>
-                    <a:bodyPr/>
-                    <a:lstStyle/>
-                    <a:p>
-                      <a:pPr algn="l"/>
-                      <a:r>
-                        <a:rPr sz="1000" b="0">
-                          <a:solidFill>
-                            <a:srgbClr val="1D1B43"/>
-                          </a:solidFill>
-                          <a:latin typeface="Calibri"/>
-                        </a:rPr>
-                        <a:t>3</a:t>
-                      </a:r>
-                    </a:p>
-                  </a:txBody>
-                  <a:tcPr>
-                    <a:solidFill>
-                      <a:srgbClr val="F2F2F2"/>
-                    </a:solidFill>
-                  </a:tcPr>
-                </a:tc>
-                <a:tc>
-                  <a:txBody>
-                    <a:bodyPr/>
-                    <a:lstStyle/>
-                    <a:p>
-                      <a:pPr algn="l"/>
-                      <a:r>
-                        <a:rPr sz="1000" b="0">
-                          <a:solidFill>
-                            <a:srgbClr val="1D1B43"/>
-                          </a:solidFill>
-                          <a:latin typeface="Calibri"/>
-                        </a:rPr>
-                        <a:t>91.7%</a:t>
-                      </a:r>
-                    </a:p>
-                  </a:txBody>
-                  <a:tcPr>
-                    <a:solidFill>
-                      <a:srgbClr val="F2F2F2"/>
                     </a:solidFill>
                   </a:tcPr>
                 </a:tc>
@@ -5191,7 +5061,7 @@
                 </a:solidFill>
                 <a:latin typeface="Calibri"/>
               </a:rPr>
-              <a:t>PERFORMANCE: 91.7% - REGULAR</a:t>
+              <a:t>PERFORMANCE: 94.4% - REGULAR</a:t>
             </a:r>
           </a:p>
         </p:txBody>
@@ -5276,7 +5146,7 @@
                 </a:solidFill>
                 <a:latin typeface="Calibri"/>
               </a:rPr>
-              <a:t>OCORRENCIAS FORA DO PRAZO (3)</a:t>
+              <a:t>OCORRENCIAS FORA DO PRAZO (2)</a:t>
             </a:r>
           </a:p>
         </p:txBody>
@@ -5334,7 +5204,7 @@
         </p:nvGraphicFramePr>
         <p:xfrm>
           <a:off x="457200" y="1828800"/>
-          <a:ext cx="11429999" cy="1536192"/>
+          <a:ext cx="11429999" cy="1152144"/>
         </p:xfrm>
         <a:graphic>
           <a:graphicData uri="http://schemas.openxmlformats.org/drawingml/2006/table">
@@ -5480,7 +5350,7 @@
                           </a:solidFill>
                           <a:latin typeface="Calibri"/>
                         </a:rPr>
-                        <a:t>278931</a:t>
+                        <a:t>279604</a:t>
                       </a:r>
                     </a:p>
                   </a:txBody>
@@ -5503,7 +5373,7 @@
                           </a:solidFill>
                           <a:latin typeface="Calibri"/>
                         </a:rPr>
-                        <a:t>JACARANDA TECH LTDA - SAO PAULO / SP</a:t>
+                        <a:t>PORTOEXPRESS LOGISTI - ITAJAI / SC</a:t>
                       </a:r>
                     </a:p>
                   </a:txBody>
@@ -5526,7 +5396,7 @@
                           </a:solidFill>
                           <a:latin typeface="Calibri"/>
                         </a:rPr>
-                        <a:t>SAO PAULO/SP</a:t>
+                        <a:t>ITAJAI/SC</a:t>
                       </a:r>
                     </a:p>
                   </a:txBody>
@@ -5549,7 +5419,7 @@
                           </a:solidFill>
                           <a:latin typeface="Calibri"/>
                         </a:rPr>
-                        <a:t>15/04/2026</a:t>
+                        <a:t>27/04/2026</a:t>
                       </a:r>
                     </a:p>
                   </a:txBody>
@@ -5597,7 +5467,7 @@
                           </a:solidFill>
                           <a:latin typeface="Calibri"/>
                         </a:rPr>
-                        <a:t>279604</a:t>
+                        <a:t>280426</a:t>
                       </a:r>
                     </a:p>
                   </a:txBody>
@@ -5620,7 +5490,7 @@
                           </a:solidFill>
                           <a:latin typeface="Calibri"/>
                         </a:rPr>
-                        <a:t>PORTOEXPRESS LOGISTI - ITAJAI / SC</a:t>
+                        <a:t>VOTECH TECNOLOGIA EM - MARINGA / PR</a:t>
                       </a:r>
                     </a:p>
                   </a:txBody>
@@ -5643,7 +5513,7 @@
                           </a:solidFill>
                           <a:latin typeface="Calibri"/>
                         </a:rPr>
-                        <a:t>ITAJAI/SC</a:t>
+                        <a:t>MARINGA/PR</a:t>
                       </a:r>
                     </a:p>
                   </a:txBody>
@@ -5666,7 +5536,7 @@
                           </a:solidFill>
                           <a:latin typeface="Calibri"/>
                         </a:rPr>
-                        <a:t>27/04/2026</a:t>
+                        <a:t>30/04/2026</a:t>
                       </a:r>
                     </a:p>
                   </a:txBody>
@@ -5689,130 +5559,13 @@
                           </a:solidFill>
                           <a:latin typeface="Calibri"/>
                         </a:rPr>
-                        <a:t>ENTREGUE FORA DO PRAZO</a:t>
+                        <a:t>FORA DO PRAZO</a:t>
                       </a:r>
                     </a:p>
                   </a:txBody>
                   <a:tcPr>
                     <a:solidFill>
                       <a:srgbClr val="F2F2F2"/>
-                    </a:solidFill>
-                  </a:tcPr>
-                </a:tc>
-              </a:tr>
-              <a:tr h="384048">
-                <a:tc>
-                  <a:txBody>
-                    <a:bodyPr/>
-                    <a:lstStyle/>
-                    <a:p>
-                      <a:pPr algn="l"/>
-                      <a:r>
-                        <a:rPr sz="1000" b="0">
-                          <a:solidFill>
-                            <a:srgbClr val="1D1B43"/>
-                          </a:solidFill>
-                          <a:latin typeface="Calibri"/>
-                        </a:rPr>
-                        <a:t>280426</a:t>
-                      </a:r>
-                    </a:p>
-                  </a:txBody>
-                  <a:tcPr>
-                    <a:solidFill>
-                      <a:srgbClr val="FFFFFF"/>
-                    </a:solidFill>
-                  </a:tcPr>
-                </a:tc>
-                <a:tc>
-                  <a:txBody>
-                    <a:bodyPr/>
-                    <a:lstStyle/>
-                    <a:p>
-                      <a:pPr algn="l"/>
-                      <a:r>
-                        <a:rPr sz="1000" b="0">
-                          <a:solidFill>
-                            <a:srgbClr val="1D1B43"/>
-                          </a:solidFill>
-                          <a:latin typeface="Calibri"/>
-                        </a:rPr>
-                        <a:t>VOTECH TECNOLOGIA EM - MARINGA / PR</a:t>
-                      </a:r>
-                    </a:p>
-                  </a:txBody>
-                  <a:tcPr>
-                    <a:solidFill>
-                      <a:srgbClr val="FFFFFF"/>
-                    </a:solidFill>
-                  </a:tcPr>
-                </a:tc>
-                <a:tc>
-                  <a:txBody>
-                    <a:bodyPr/>
-                    <a:lstStyle/>
-                    <a:p>
-                      <a:pPr algn="l"/>
-                      <a:r>
-                        <a:rPr sz="1000" b="0">
-                          <a:solidFill>
-                            <a:srgbClr val="1D1B43"/>
-                          </a:solidFill>
-                          <a:latin typeface="Calibri"/>
-                        </a:rPr>
-                        <a:t>MARINGA/PR</a:t>
-                      </a:r>
-                    </a:p>
-                  </a:txBody>
-                  <a:tcPr>
-                    <a:solidFill>
-                      <a:srgbClr val="FFFFFF"/>
-                    </a:solidFill>
-                  </a:tcPr>
-                </a:tc>
-                <a:tc>
-                  <a:txBody>
-                    <a:bodyPr/>
-                    <a:lstStyle/>
-                    <a:p>
-                      <a:pPr algn="l"/>
-                      <a:r>
-                        <a:rPr sz="1000" b="0">
-                          <a:solidFill>
-                            <a:srgbClr val="1D1B43"/>
-                          </a:solidFill>
-                          <a:latin typeface="Calibri"/>
-                        </a:rPr>
-                        <a:t>30/04/2026</a:t>
-                      </a:r>
-                    </a:p>
-                  </a:txBody>
-                  <a:tcPr>
-                    <a:solidFill>
-                      <a:srgbClr val="FFFFFF"/>
-                    </a:solidFill>
-                  </a:tcPr>
-                </a:tc>
-                <a:tc>
-                  <a:txBody>
-                    <a:bodyPr/>
-                    <a:lstStyle/>
-                    <a:p>
-                      <a:pPr algn="l"/>
-                      <a:r>
-                        <a:rPr sz="1000" b="0">
-                          <a:solidFill>
-                            <a:srgbClr val="1D1B43"/>
-                          </a:solidFill>
-                          <a:latin typeface="Calibri"/>
-                        </a:rPr>
-                        <a:t>FORA DO PRAZO</a:t>
-                      </a:r>
-                    </a:p>
-                  </a:txBody>
-                  <a:tcPr>
-                    <a:solidFill>
-                      <a:srgbClr val="FFFFFF"/>
                     </a:solidFill>
                   </a:tcPr>
                 </a:tc>
@@ -6175,7 +5928,7 @@
                           </a:solidFill>
                           <a:latin typeface="Calibri"/>
                         </a:rPr>
-                        <a:t>17</a:t>
+                        <a:t>18</a:t>
                       </a:r>
                     </a:p>
                   </a:txBody>
@@ -6198,7 +5951,7 @@
                           </a:solidFill>
                           <a:latin typeface="Calibri"/>
                         </a:rPr>
-                        <a:t>1</a:t>
+                        <a:t>0</a:t>
                       </a:r>
                     </a:p>
                   </a:txBody>
@@ -6221,7 +5974,7 @@
                           </a:solidFill>
                           <a:latin typeface="Calibri"/>
                         </a:rPr>
-                        <a:t>94.4%</a:t>
+                        <a:t>100.0%</a:t>
                       </a:r>
                     </a:p>
                   </a:txBody>
@@ -6244,7 +5997,7 @@
                           </a:solidFill>
                           <a:latin typeface="Calibri"/>
                         </a:rPr>
-                        <a:t>Regular</a:t>
+                        <a:t>Excelente</a:t>
                       </a:r>
                     </a:p>
                   </a:txBody>

--- a/SEGER_COMERCIAL_IMPORTADORA_E.pptx
+++ b/SEGER_COMERCIAL_IMPORTADORA_E.pptx
@@ -143,10 +143,13 @@
           </c:spPr>
           <c:cat>
             <c:strRef>
-              <c:f>Sheet1!$A$2:$A$2</c:f>
+              <c:f>Sheet1!$A$2:$A$3</c:f>
               <c:strCache>
-                <c:ptCount val="1"/>
+                <c:ptCount val="2"/>
                 <c:pt idx="0">
+                  <c:v>Maio 2026</c:v>
+                </c:pt>
+                <c:pt idx="1">
                   <c:v>Abril 2026</c:v>
                 </c:pt>
               </c:strCache>
@@ -154,11 +157,14 @@
           </c:cat>
           <c:val>
             <c:numRef>
-              <c:f>Sheet1!$B$2:$B$2</c:f>
+              <c:f>Sheet1!$B$2:$B$3</c:f>
               <c:numCache>
                 <c:formatCode>General</c:formatCode>
-                <c:ptCount val="1"/>
+                <c:ptCount val="2"/>
                 <c:pt idx="0">
+                  <c:v>7</c:v>
+                </c:pt>
+                <c:pt idx="1">
                   <c:v>34</c:v>
                 </c:pt>
               </c:numCache>
@@ -186,10 +192,13 @@
           </c:spPr>
           <c:cat>
             <c:strRef>
-              <c:f>Sheet1!$A$2:$A$2</c:f>
+              <c:f>Sheet1!$A$2:$A$3</c:f>
               <c:strCache>
-                <c:ptCount val="1"/>
+                <c:ptCount val="2"/>
                 <c:pt idx="0">
+                  <c:v>Maio 2026</c:v>
+                </c:pt>
+                <c:pt idx="1">
                   <c:v>Abril 2026</c:v>
                 </c:pt>
               </c:strCache>
@@ -197,11 +206,14 @@
           </c:cat>
           <c:val>
             <c:numRef>
-              <c:f>Sheet1!$C$2:$C$2</c:f>
+              <c:f>Sheet1!$C$2:$C$3</c:f>
               <c:numCache>
                 <c:formatCode>General</c:formatCode>
-                <c:ptCount val="1"/>
+                <c:ptCount val="2"/>
                 <c:pt idx="0">
+                  <c:v>4</c:v>
+                </c:pt>
+                <c:pt idx="1">
                   <c:v>2</c:v>
                 </c:pt>
               </c:numCache>
@@ -4142,7 +4154,7 @@
                           </a:solidFill>
                           <a:latin typeface="Calibri"/>
                         </a:rPr>
-                        <a:t>Marco 2026</a:t>
+                        <a:t>Maio 2026</a:t>
                       </a:r>
                     </a:p>
                   </a:txBody>
@@ -4236,7 +4248,7 @@
                           </a:solidFill>
                           <a:latin typeface="Calibri"/>
                         </a:rPr>
-                        <a:t>-</a:t>
+                        <a:t>11</a:t>
                       </a:r>
                     </a:p>
                   </a:txBody>
@@ -4282,7 +4294,7 @@
                           </a:solidFill>
                           <a:latin typeface="Calibri"/>
                         </a:rPr>
-                        <a:t>-</a:t>
+                        <a:t>+ 25</a:t>
                       </a:r>
                     </a:p>
                   </a:txBody>
@@ -4330,7 +4342,7 @@
                           </a:solidFill>
                           <a:latin typeface="Calibri"/>
                         </a:rPr>
-                        <a:t>-</a:t>
+                        <a:t>7</a:t>
                       </a:r>
                     </a:p>
                   </a:txBody>
@@ -4376,7 +4388,7 @@
                           </a:solidFill>
                           <a:latin typeface="Calibri"/>
                         </a:rPr>
-                        <a:t>-</a:t>
+                        <a:t>+ 27</a:t>
                       </a:r>
                     </a:p>
                   </a:txBody>
@@ -4424,7 +4436,7 @@
                           </a:solidFill>
                           <a:latin typeface="Calibri"/>
                         </a:rPr>
-                        <a:t>-</a:t>
+                        <a:t>4</a:t>
                       </a:r>
                     </a:p>
                   </a:txBody>
@@ -4470,7 +4482,7 @@
                           </a:solidFill>
                           <a:latin typeface="Calibri"/>
                         </a:rPr>
-                        <a:t>-</a:t>
+                        <a:t>- 2</a:t>
                       </a:r>
                     </a:p>
                   </a:txBody>
@@ -4518,7 +4530,7 @@
                           </a:solidFill>
                           <a:latin typeface="Calibri"/>
                         </a:rPr>
-                        <a:t>-</a:t>
+                        <a:t>63.6%</a:t>
                       </a:r>
                     </a:p>
                   </a:txBody>
@@ -4564,7 +4576,7 @@
                           </a:solidFill>
                           <a:latin typeface="Calibri"/>
                         </a:rPr>
-                        <a:t>-</a:t>
+                        <a:t>+ 30.8pp</a:t>
                       </a:r>
                     </a:p>
                   </a:txBody>
@@ -4735,7 +4747,7 @@
         </p:nvGraphicFramePr>
         <p:xfrm>
           <a:off x="7955279" y="2286000"/>
-          <a:ext cx="4480560" cy="877824"/>
+          <a:ext cx="4480560" cy="1316736"/>
         </p:xfrm>
         <a:graphic>
           <a:graphicData uri="http://schemas.openxmlformats.org/drawingml/2006/table">
@@ -4881,13 +4893,130 @@
                           </a:solidFill>
                           <a:latin typeface="Calibri"/>
                         </a:rPr>
+                        <a:t>Maio 2026</a:t>
+                      </a:r>
+                    </a:p>
+                  </a:txBody>
+                  <a:tcPr>
+                    <a:solidFill>
+                      <a:srgbClr val="FFFFFF"/>
+                    </a:solidFill>
+                  </a:tcPr>
+                </a:tc>
+                <a:tc>
+                  <a:txBody>
+                    <a:bodyPr/>
+                    <a:lstStyle/>
+                    <a:p>
+                      <a:pPr algn="l"/>
+                      <a:r>
+                        <a:rPr sz="1000" b="0">
+                          <a:solidFill>
+                            <a:srgbClr val="1D1B43"/>
+                          </a:solidFill>
+                          <a:latin typeface="Calibri"/>
+                        </a:rPr>
+                        <a:t>11</a:t>
+                      </a:r>
+                    </a:p>
+                  </a:txBody>
+                  <a:tcPr>
+                    <a:solidFill>
+                      <a:srgbClr val="FFFFFF"/>
+                    </a:solidFill>
+                  </a:tcPr>
+                </a:tc>
+                <a:tc>
+                  <a:txBody>
+                    <a:bodyPr/>
+                    <a:lstStyle/>
+                    <a:p>
+                      <a:pPr algn="l"/>
+                      <a:r>
+                        <a:rPr sz="1000" b="0">
+                          <a:solidFill>
+                            <a:srgbClr val="1D1B43"/>
+                          </a:solidFill>
+                          <a:latin typeface="Calibri"/>
+                        </a:rPr>
+                        <a:t>7</a:t>
+                      </a:r>
+                    </a:p>
+                  </a:txBody>
+                  <a:tcPr>
+                    <a:solidFill>
+                      <a:srgbClr val="FFFFFF"/>
+                    </a:solidFill>
+                  </a:tcPr>
+                </a:tc>
+                <a:tc>
+                  <a:txBody>
+                    <a:bodyPr/>
+                    <a:lstStyle/>
+                    <a:p>
+                      <a:pPr algn="l"/>
+                      <a:r>
+                        <a:rPr sz="1000" b="0">
+                          <a:solidFill>
+                            <a:srgbClr val="1D1B43"/>
+                          </a:solidFill>
+                          <a:latin typeface="Calibri"/>
+                        </a:rPr>
+                        <a:t>4</a:t>
+                      </a:r>
+                    </a:p>
+                  </a:txBody>
+                  <a:tcPr>
+                    <a:solidFill>
+                      <a:srgbClr val="FFFFFF"/>
+                    </a:solidFill>
+                  </a:tcPr>
+                </a:tc>
+                <a:tc>
+                  <a:txBody>
+                    <a:bodyPr/>
+                    <a:lstStyle/>
+                    <a:p>
+                      <a:pPr algn="l"/>
+                      <a:r>
+                        <a:rPr sz="1000" b="0">
+                          <a:solidFill>
+                            <a:srgbClr val="1D1B43"/>
+                          </a:solidFill>
+                          <a:latin typeface="Calibri"/>
+                        </a:rPr>
+                        <a:t>63.6%</a:t>
+                      </a:r>
+                    </a:p>
+                  </a:txBody>
+                  <a:tcPr>
+                    <a:solidFill>
+                      <a:srgbClr val="FFFFFF"/>
+                    </a:solidFill>
+                  </a:tcPr>
+                </a:tc>
+              </a:tr>
+              <a:tr h="438912">
+                <a:tc>
+                  <a:txBody>
+                    <a:bodyPr/>
+                    <a:lstStyle/>
+                    <a:p>
+                      <a:pPr algn="l"/>
+                      <a:r>
+                        <a:rPr sz="1000" b="0">
+                          <a:solidFill>
+                            <a:srgbClr val="1D1B43"/>
+                          </a:solidFill>
+                          <a:latin typeface="Calibri"/>
+                        </a:rPr>
                         <a:t>Abril 2026</a:t>
                       </a:r>
                     </a:p>
                   </a:txBody>
                   <a:tcPr>
                     <a:solidFill>
-                      <a:srgbClr val="FFFFFF"/>
+                      <a:srgbClr val="F2F2F2"/>
                     </a:solidFill>
                   </a:tcPr>
                 </a:tc>
@@ -4910,7 +5039,7 @@
                   </a:txBody>
                   <a:tcPr>
                     <a:solidFill>
-                      <a:srgbClr val="FFFFFF"/>
+                      <a:srgbClr val="F2F2F2"/>
                     </a:solidFill>
                   </a:tcPr>
                 </a:tc>
@@ -4933,7 +5062,7 @@
                   </a:txBody>
                   <a:tcPr>
                     <a:solidFill>
-                      <a:srgbClr val="FFFFFF"/>
+                      <a:srgbClr val="F2F2F2"/>
                     </a:solidFill>
                   </a:tcPr>
                 </a:tc>
@@ -4956,7 +5085,7 @@
                   </a:txBody>
                   <a:tcPr>
                     <a:solidFill>
-                      <a:srgbClr val="FFFFFF"/>
+                      <a:srgbClr val="F2F2F2"/>
                     </a:solidFill>
                   </a:tcPr>
                 </a:tc>
@@ -4979,7 +5108,7 @@
                   </a:txBody>
                   <a:tcPr>
                     <a:solidFill>
-                      <a:srgbClr val="FFFFFF"/>
+                      <a:srgbClr val="F2F2F2"/>
                     </a:solidFill>
                   </a:tcPr>
                 </a:tc>

--- a/SEGER_COMERCIAL_IMPORTADORA_E.pptx
+++ b/SEGER_COMERCIAL_IMPORTADORA_E.pptx
@@ -162,7 +162,7 @@
                 <c:formatCode>General</c:formatCode>
                 <c:ptCount val="2"/>
                 <c:pt idx="0">
-                  <c:v>7</c:v>
+                  <c:v>11</c:v>
                 </c:pt>
                 <c:pt idx="1">
                   <c:v>34</c:v>
@@ -211,7 +211,7 @@
                 <c:formatCode>General</c:formatCode>
                 <c:ptCount val="2"/>
                 <c:pt idx="0">
-                  <c:v>4</c:v>
+                  <c:v>6</c:v>
                 </c:pt>
                 <c:pt idx="1">
                   <c:v>2</c:v>
@@ -4248,7 +4248,7 @@
                           </a:solidFill>
                           <a:latin typeface="Calibri"/>
                         </a:rPr>
-                        <a:t>11</a:t>
+                        <a:t>17</a:t>
                       </a:r>
                     </a:p>
                   </a:txBody>
@@ -4294,7 +4294,7 @@
                           </a:solidFill>
                           <a:latin typeface="Calibri"/>
                         </a:rPr>
-                        <a:t>+ 25</a:t>
+                        <a:t>+ 19</a:t>
                       </a:r>
                     </a:p>
                   </a:txBody>
@@ -4342,7 +4342,7 @@
                           </a:solidFill>
                           <a:latin typeface="Calibri"/>
                         </a:rPr>
-                        <a:t>7</a:t>
+                        <a:t>11</a:t>
                       </a:r>
                     </a:p>
                   </a:txBody>
@@ -4388,7 +4388,7 @@
                           </a:solidFill>
                           <a:latin typeface="Calibri"/>
                         </a:rPr>
-                        <a:t>+ 27</a:t>
+                        <a:t>+ 23</a:t>
                       </a:r>
                     </a:p>
                   </a:txBody>
@@ -4436,7 +4436,7 @@
                           </a:solidFill>
                           <a:latin typeface="Calibri"/>
                         </a:rPr>
-                        <a:t>4</a:t>
+                        <a:t>6</a:t>
                       </a:r>
                     </a:p>
                   </a:txBody>
@@ -4482,7 +4482,7 @@
                           </a:solidFill>
                           <a:latin typeface="Calibri"/>
                         </a:rPr>
-                        <a:t>- 2</a:t>
+                        <a:t>- 4</a:t>
                       </a:r>
                     </a:p>
                   </a:txBody>
@@ -4530,7 +4530,7 @@
                           </a:solidFill>
                           <a:latin typeface="Calibri"/>
                         </a:rPr>
-                        <a:t>63.6%</a:t>
+                        <a:t>64.7%</a:t>
                       </a:r>
                     </a:p>
                   </a:txBody>
@@ -4576,7 +4576,7 @@
                           </a:solidFill>
                           <a:latin typeface="Calibri"/>
                         </a:rPr>
-                        <a:t>+ 30.8pp</a:t>
+                        <a:t>+ 29.7pp</a:t>
                       </a:r>
                     </a:p>
                   </a:txBody>
@@ -4916,6 +4916,29 @@
                           </a:solidFill>
                           <a:latin typeface="Calibri"/>
                         </a:rPr>
+                        <a:t>17</a:t>
+                      </a:r>
+                    </a:p>
+                  </a:txBody>
+                  <a:tcPr>
+                    <a:solidFill>
+                      <a:srgbClr val="FFFFFF"/>
+                    </a:solidFill>
+                  </a:tcPr>
+                </a:tc>
+                <a:tc>
+                  <a:txBody>
+                    <a:bodyPr/>
+                    <a:lstStyle/>
+                    <a:p>
+                      <a:pPr algn="l"/>
+                      <a:r>
+                        <a:rPr sz="1000" b="0">
+                          <a:solidFill>
+                            <a:srgbClr val="1D1B43"/>
+                          </a:solidFill>
+                          <a:latin typeface="Calibri"/>
+                        </a:rPr>
                         <a:t>11</a:t>
                       </a:r>
                     </a:p>
@@ -4939,7 +4962,7 @@
                           </a:solidFill>
                           <a:latin typeface="Calibri"/>
                         </a:rPr>
-                        <a:t>7</a:t>
+                        <a:t>6</a:t>
                       </a:r>
                     </a:p>
                   </a:txBody>
@@ -4962,30 +4985,7 @@
                           </a:solidFill>
                           <a:latin typeface="Calibri"/>
                         </a:rPr>
-                        <a:t>4</a:t>
-                      </a:r>
-                    </a:p>
-                  </a:txBody>
-                  <a:tcPr>
-                    <a:solidFill>
-                      <a:srgbClr val="FFFFFF"/>
-                    </a:solidFill>
-                  </a:tcPr>
-                </a:tc>
-                <a:tc>
-                  <a:txBody>
-                    <a:bodyPr/>
-                    <a:lstStyle/>
-                    <a:p>
-                      <a:pPr algn="l"/>
-                      <a:r>
-                        <a:rPr sz="1000" b="0">
-                          <a:solidFill>
-                            <a:srgbClr val="1D1B43"/>
-                          </a:solidFill>
-                          <a:latin typeface="Calibri"/>
-                        </a:rPr>
-                        <a:t>63.6%</a:t>
+                        <a:t>64.7%</a:t>
                       </a:r>
                     </a:p>
                   </a:txBody>

--- a/SEGER_COMERCIAL_IMPORTADORA_E.pptx
+++ b/SEGER_COMERCIAL_IMPORTADORA_E.pptx
@@ -147,10 +147,10 @@
               <c:strCache>
                 <c:ptCount val="2"/>
                 <c:pt idx="0">
-                  <c:v>Maio 2026</c:v>
+                  <c:v>Abril 2026</c:v>
                 </c:pt>
                 <c:pt idx="1">
-                  <c:v>Abril 2026</c:v>
+                  <c:v>Maio 2026</c:v>
                 </c:pt>
               </c:strCache>
             </c:strRef>
@@ -162,10 +162,10 @@
                 <c:formatCode>General</c:formatCode>
                 <c:ptCount val="2"/>
                 <c:pt idx="0">
-                  <c:v>11</c:v>
+                  <c:v>34</c:v>
                 </c:pt>
                 <c:pt idx="1">
-                  <c:v>34</c:v>
+                  <c:v>14</c:v>
                 </c:pt>
               </c:numCache>
             </c:numRef>
@@ -196,10 +196,10 @@
               <c:strCache>
                 <c:ptCount val="2"/>
                 <c:pt idx="0">
-                  <c:v>Maio 2026</c:v>
+                  <c:v>Abril 2026</c:v>
                 </c:pt>
                 <c:pt idx="1">
-                  <c:v>Abril 2026</c:v>
+                  <c:v>Maio 2026</c:v>
                 </c:pt>
               </c:strCache>
             </c:strRef>
@@ -211,10 +211,10 @@
                 <c:formatCode>General</c:formatCode>
                 <c:ptCount val="2"/>
                 <c:pt idx="0">
-                  <c:v>6</c:v>
+                  <c:v>2</c:v>
                 </c:pt>
                 <c:pt idx="1">
-                  <c:v>2</c:v>
+                  <c:v>7</c:v>
                 </c:pt>
               </c:numCache>
             </c:numRef>
@@ -3387,7 +3387,7 @@
                 </a:solidFill>
                 <a:latin typeface="Calibri"/>
               </a:rPr>
-              <a:t>INDICADORES ABRIL 2026</a:t>
+              <a:t>INDICADORES MAIO 2026</a:t>
             </a:r>
           </a:p>
         </p:txBody>
@@ -3708,7 +3708,7 @@
                 </a:solidFill>
                 <a:latin typeface="Calibri"/>
               </a:rPr>
-              <a:t>36</a:t>
+              <a:t>21</a:t>
             </a:r>
           </a:p>
         </p:txBody>
@@ -3823,7 +3823,7 @@
                 </a:solidFill>
                 <a:latin typeface="Calibri"/>
               </a:rPr>
-              <a:t>34</a:t>
+              <a:t>14</a:t>
             </a:r>
           </a:p>
         </p:txBody>
@@ -3938,7 +3938,7 @@
                 </a:solidFill>
                 <a:latin typeface="Calibri"/>
               </a:rPr>
-              <a:t>2</a:t>
+              <a:t>7</a:t>
             </a:r>
           </a:p>
         </p:txBody>
@@ -4049,11 +4049,11 @@
             <a:r>
               <a:rPr sz="2800" b="1">
                 <a:solidFill>
-                  <a:srgbClr val="F59E0B"/>
+                  <a:srgbClr val="EF4444"/>
                 </a:solidFill>
                 <a:latin typeface="Calibri"/>
               </a:rPr>
-              <a:t>94.4%</a:t>
+              <a:t>66.7%</a:t>
             </a:r>
           </a:p>
         </p:txBody>
@@ -4154,30 +4154,30 @@
                           </a:solidFill>
                           <a:latin typeface="Calibri"/>
                         </a:rPr>
+                        <a:t>Abril 2026</a:t>
+                      </a:r>
+                    </a:p>
+                  </a:txBody>
+                  <a:tcPr>
+                    <a:solidFill>
+                      <a:srgbClr val="1D1B43"/>
+                    </a:solidFill>
+                  </a:tcPr>
+                </a:tc>
+                <a:tc>
+                  <a:txBody>
+                    <a:bodyPr/>
+                    <a:lstStyle/>
+                    <a:p>
+                      <a:pPr algn="ctr"/>
+                      <a:r>
+                        <a:rPr sz="1100" b="1">
+                          <a:solidFill>
+                            <a:srgbClr val="FFFFFF"/>
+                          </a:solidFill>
+                          <a:latin typeface="Calibri"/>
+                        </a:rPr>
                         <a:t>Maio 2026</a:t>
-                      </a:r>
-                    </a:p>
-                  </a:txBody>
-                  <a:tcPr>
-                    <a:solidFill>
-                      <a:srgbClr val="1D1B43"/>
-                    </a:solidFill>
-                  </a:tcPr>
-                </a:tc>
-                <a:tc>
-                  <a:txBody>
-                    <a:bodyPr/>
-                    <a:lstStyle/>
-                    <a:p>
-                      <a:pPr algn="ctr"/>
-                      <a:r>
-                        <a:rPr sz="1100" b="1">
-                          <a:solidFill>
-                            <a:srgbClr val="FFFFFF"/>
-                          </a:solidFill>
-                          <a:latin typeface="Calibri"/>
-                        </a:rPr>
-                        <a:t>Abril 2026</a:t>
                       </a:r>
                     </a:p>
                   </a:txBody>
@@ -4248,7 +4248,7 @@
                           </a:solidFill>
                           <a:latin typeface="Calibri"/>
                         </a:rPr>
-                        <a:t>17</a:t>
+                        <a:t>36</a:t>
                       </a:r>
                     </a:p>
                   </a:txBody>
@@ -4271,7 +4271,7 @@
                           </a:solidFill>
                           <a:latin typeface="Calibri"/>
                         </a:rPr>
-                        <a:t>36</a:t>
+                        <a:t>21</a:t>
                       </a:r>
                     </a:p>
                   </a:txBody>
@@ -4294,7 +4294,7 @@
                           </a:solidFill>
                           <a:latin typeface="Calibri"/>
                         </a:rPr>
-                        <a:t>+ 19</a:t>
+                        <a:t>- 15</a:t>
                       </a:r>
                     </a:p>
                   </a:txBody>
@@ -4342,7 +4342,7 @@
                           </a:solidFill>
                           <a:latin typeface="Calibri"/>
                         </a:rPr>
-                        <a:t>11</a:t>
+                        <a:t>34</a:t>
                       </a:r>
                     </a:p>
                   </a:txBody>
@@ -4365,7 +4365,7 @@
                           </a:solidFill>
                           <a:latin typeface="Calibri"/>
                         </a:rPr>
-                        <a:t>34</a:t>
+                        <a:t>14</a:t>
                       </a:r>
                     </a:p>
                   </a:txBody>
@@ -4388,7 +4388,7 @@
                           </a:solidFill>
                           <a:latin typeface="Calibri"/>
                         </a:rPr>
-                        <a:t>+ 23</a:t>
+                        <a:t>- 20</a:t>
                       </a:r>
                     </a:p>
                   </a:txBody>
@@ -4436,7 +4436,7 @@
                           </a:solidFill>
                           <a:latin typeface="Calibri"/>
                         </a:rPr>
-                        <a:t>6</a:t>
+                        <a:t>2</a:t>
                       </a:r>
                     </a:p>
                   </a:txBody>
@@ -4459,7 +4459,7 @@
                           </a:solidFill>
                           <a:latin typeface="Calibri"/>
                         </a:rPr>
-                        <a:t>2</a:t>
+                        <a:t>7</a:t>
                       </a:r>
                     </a:p>
                   </a:txBody>
@@ -4482,7 +4482,7 @@
                           </a:solidFill>
                           <a:latin typeface="Calibri"/>
                         </a:rPr>
-                        <a:t>- 4</a:t>
+                        <a:t>+ 5</a:t>
                       </a:r>
                     </a:p>
                   </a:txBody>
@@ -4530,7 +4530,7 @@
                           </a:solidFill>
                           <a:latin typeface="Calibri"/>
                         </a:rPr>
-                        <a:t>64.7%</a:t>
+                        <a:t>94.4%</a:t>
                       </a:r>
                     </a:p>
                   </a:txBody>
@@ -4553,7 +4553,7 @@
                           </a:solidFill>
                           <a:latin typeface="Calibri"/>
                         </a:rPr>
-                        <a:t>94.4%</a:t>
+                        <a:t>66.7%</a:t>
                       </a:r>
                     </a:p>
                   </a:txBody>
@@ -4576,7 +4576,7 @@
                           </a:solidFill>
                           <a:latin typeface="Calibri"/>
                         </a:rPr>
-                        <a:t>+ 29.7pp</a:t>
+                        <a:t>- 27.7pp</a:t>
                       </a:r>
                     </a:p>
                   </a:txBody>
@@ -4893,7 +4893,7 @@
                           </a:solidFill>
                           <a:latin typeface="Calibri"/>
                         </a:rPr>
-                        <a:t>Maio 2026</a:t>
+                        <a:t>Abril 2026</a:t>
                       </a:r>
                     </a:p>
                   </a:txBody>
@@ -4916,7 +4916,7 @@
                           </a:solidFill>
                           <a:latin typeface="Calibri"/>
                         </a:rPr>
-                        <a:t>17</a:t>
+                        <a:t>36</a:t>
                       </a:r>
                     </a:p>
                   </a:txBody>
@@ -4939,7 +4939,7 @@
                           </a:solidFill>
                           <a:latin typeface="Calibri"/>
                         </a:rPr>
-                        <a:t>11</a:t>
+                        <a:t>34</a:t>
                       </a:r>
                     </a:p>
                   </a:txBody>
@@ -4962,7 +4962,7 @@
                           </a:solidFill>
                           <a:latin typeface="Calibri"/>
                         </a:rPr>
-                        <a:t>6</a:t>
+                        <a:t>2</a:t>
                       </a:r>
                     </a:p>
                   </a:txBody>
@@ -4985,7 +4985,7 @@
                           </a:solidFill>
                           <a:latin typeface="Calibri"/>
                         </a:rPr>
-                        <a:t>64.7%</a:t>
+                        <a:t>94.4%</a:t>
                       </a:r>
                     </a:p>
                   </a:txBody>
@@ -5010,7 +5010,7 @@
                           </a:solidFill>
                           <a:latin typeface="Calibri"/>
                         </a:rPr>
-                        <a:t>Abril 2026</a:t>
+                        <a:t>Maio 2026</a:t>
                       </a:r>
                     </a:p>
                   </a:txBody>
@@ -5033,7 +5033,7 @@
                           </a:solidFill>
                           <a:latin typeface="Calibri"/>
                         </a:rPr>
-                        <a:t>36</a:t>
+                        <a:t>21</a:t>
                       </a:r>
                     </a:p>
                   </a:txBody>
@@ -5056,7 +5056,7 @@
                           </a:solidFill>
                           <a:latin typeface="Calibri"/>
                         </a:rPr>
-                        <a:t>34</a:t>
+                        <a:t>14</a:t>
                       </a:r>
                     </a:p>
                   </a:txBody>
@@ -5079,7 +5079,7 @@
                           </a:solidFill>
                           <a:latin typeface="Calibri"/>
                         </a:rPr>
-                        <a:t>2</a:t>
+                        <a:t>7</a:t>
                       </a:r>
                     </a:p>
                   </a:txBody>
@@ -5102,7 +5102,7 @@
                           </a:solidFill>
                           <a:latin typeface="Calibri"/>
                         </a:rPr>
-                        <a:t>94.4%</a:t>
+                        <a:t>66.7%</a:t>
                       </a:r>
                     </a:p>
                   </a:txBody>
@@ -5190,7 +5190,7 @@
                 </a:solidFill>
                 <a:latin typeface="Calibri"/>
               </a:rPr>
-              <a:t>PERFORMANCE: 94.4% - REGULAR</a:t>
+              <a:t>PERFORMANCE: 66.7% - ATENCAO</a:t>
             </a:r>
           </a:p>
         </p:txBody>
@@ -5275,7 +5275,7 @@
                 </a:solidFill>
                 <a:latin typeface="Calibri"/>
               </a:rPr>
-              <a:t>OCORRENCIAS FORA DO PRAZO (2)</a:t>
+              <a:t>OCORRENCIAS FORA DO PRAZO (7)</a:t>
             </a:r>
           </a:p>
         </p:txBody>
@@ -5333,7 +5333,7 @@
         </p:nvGraphicFramePr>
         <p:xfrm>
           <a:off x="457200" y="1828800"/>
-          <a:ext cx="11429999" cy="1152144"/>
+          <a:ext cx="11429999" cy="3072384"/>
         </p:xfrm>
         <a:graphic>
           <a:graphicData uri="http://schemas.openxmlformats.org/drawingml/2006/table">
@@ -5479,7 +5479,7 @@
                           </a:solidFill>
                           <a:latin typeface="Calibri"/>
                         </a:rPr>
-                        <a:t>279604</a:t>
+                        <a:t>281893</a:t>
                       </a:r>
                     </a:p>
                   </a:txBody>
@@ -5502,7 +5502,7 @@
                           </a:solidFill>
                           <a:latin typeface="Calibri"/>
                         </a:rPr>
-                        <a:t>PORTOEXPRESS LOGISTI - ITAJAI / SC</a:t>
+                        <a:t>BRAVO ARMAZENS GERAI - UBERABA / MG</a:t>
                       </a:r>
                     </a:p>
                   </a:txBody>
@@ -5525,7 +5525,7 @@
                           </a:solidFill>
                           <a:latin typeface="Calibri"/>
                         </a:rPr>
-                        <a:t>ITAJAI/SC</a:t>
+                        <a:t>UBERABA/MG</a:t>
                       </a:r>
                     </a:p>
                   </a:txBody>
@@ -5548,7 +5548,7 @@
                           </a:solidFill>
                           <a:latin typeface="Calibri"/>
                         </a:rPr>
-                        <a:t>27/04/2026</a:t>
+                        <a:t>15/05/2026</a:t>
                       </a:r>
                     </a:p>
                   </a:txBody>
@@ -5596,7 +5596,7 @@
                           </a:solidFill>
                           <a:latin typeface="Calibri"/>
                         </a:rPr>
-                        <a:t>280426</a:t>
+                        <a:t>282229</a:t>
                       </a:r>
                     </a:p>
                   </a:txBody>
@@ -5619,7 +5619,7 @@
                           </a:solidFill>
                           <a:latin typeface="Calibri"/>
                         </a:rPr>
-                        <a:t>VOTECH TECNOLOGIA EM - MARINGA / PR</a:t>
+                        <a:t>SEGER COMERCIAL IMP. - SAO PAULO / SP</a:t>
                       </a:r>
                     </a:p>
                   </a:txBody>
@@ -5642,7 +5642,7 @@
                           </a:solidFill>
                           <a:latin typeface="Calibri"/>
                         </a:rPr>
-                        <a:t>MARINGA/PR</a:t>
+                        <a:t>SAO PAULO/SP</a:t>
                       </a:r>
                     </a:p>
                   </a:txBody>
@@ -5665,7 +5665,7 @@
                           </a:solidFill>
                           <a:latin typeface="Calibri"/>
                         </a:rPr>
-                        <a:t>30/04/2026</a:t>
+                        <a:t>12/05/2026</a:t>
                       </a:r>
                     </a:p>
                   </a:txBody>
@@ -5688,13 +5688,598 @@
                           </a:solidFill>
                           <a:latin typeface="Calibri"/>
                         </a:rPr>
+                        <a:t>ENTREGUE FORA DO PRAZO</a:t>
+                      </a:r>
+                    </a:p>
+                  </a:txBody>
+                  <a:tcPr>
+                    <a:solidFill>
+                      <a:srgbClr val="F2F2F2"/>
+                    </a:solidFill>
+                  </a:tcPr>
+                </a:tc>
+              </a:tr>
+              <a:tr h="384048">
+                <a:tc>
+                  <a:txBody>
+                    <a:bodyPr/>
+                    <a:lstStyle/>
+                    <a:p>
+                      <a:pPr algn="l"/>
+                      <a:r>
+                        <a:rPr sz="1000" b="0">
+                          <a:solidFill>
+                            <a:srgbClr val="1D1B43"/>
+                          </a:solidFill>
+                          <a:latin typeface="Calibri"/>
+                        </a:rPr>
+                        <a:t>282291</a:t>
+                      </a:r>
+                    </a:p>
+                  </a:txBody>
+                  <a:tcPr>
+                    <a:solidFill>
+                      <a:srgbClr val="FFFFFF"/>
+                    </a:solidFill>
+                  </a:tcPr>
+                </a:tc>
+                <a:tc>
+                  <a:txBody>
+                    <a:bodyPr/>
+                    <a:lstStyle/>
+                    <a:p>
+                      <a:pPr algn="l"/>
+                      <a:r>
+                        <a:rPr sz="1000" b="0">
+                          <a:solidFill>
+                            <a:srgbClr val="1D1B43"/>
+                          </a:solidFill>
+                          <a:latin typeface="Calibri"/>
+                        </a:rPr>
+                        <a:t>PET CENTER COMERCIO - SAO PAULO / SP</a:t>
+                      </a:r>
+                    </a:p>
+                  </a:txBody>
+                  <a:tcPr>
+                    <a:solidFill>
+                      <a:srgbClr val="FFFFFF"/>
+                    </a:solidFill>
+                  </a:tcPr>
+                </a:tc>
+                <a:tc>
+                  <a:txBody>
+                    <a:bodyPr/>
+                    <a:lstStyle/>
+                    <a:p>
+                      <a:pPr algn="l"/>
+                      <a:r>
+                        <a:rPr sz="1000" b="0">
+                          <a:solidFill>
+                            <a:srgbClr val="1D1B43"/>
+                          </a:solidFill>
+                          <a:latin typeface="Calibri"/>
+                        </a:rPr>
+                        <a:t>SAO PAULO/SP</a:t>
+                      </a:r>
+                    </a:p>
+                  </a:txBody>
+                  <a:tcPr>
+                    <a:solidFill>
+                      <a:srgbClr val="FFFFFF"/>
+                    </a:solidFill>
+                  </a:tcPr>
+                </a:tc>
+                <a:tc>
+                  <a:txBody>
+                    <a:bodyPr/>
+                    <a:lstStyle/>
+                    <a:p>
+                      <a:pPr algn="l"/>
+                      <a:r>
+                        <a:rPr sz="1000" b="0">
+                          <a:solidFill>
+                            <a:srgbClr val="1D1B43"/>
+                          </a:solidFill>
+                          <a:latin typeface="Calibri"/>
+                        </a:rPr>
+                        <a:t>12/05/2026</a:t>
+                      </a:r>
+                    </a:p>
+                  </a:txBody>
+                  <a:tcPr>
+                    <a:solidFill>
+                      <a:srgbClr val="FFFFFF"/>
+                    </a:solidFill>
+                  </a:tcPr>
+                </a:tc>
+                <a:tc>
+                  <a:txBody>
+                    <a:bodyPr/>
+                    <a:lstStyle/>
+                    <a:p>
+                      <a:pPr algn="l"/>
+                      <a:r>
+                        <a:rPr sz="1000" b="0">
+                          <a:solidFill>
+                            <a:srgbClr val="1D1B43"/>
+                          </a:solidFill>
+                          <a:latin typeface="Calibri"/>
+                        </a:rPr>
+                        <a:t>ENTREGUE FORA DO PRAZO</a:t>
+                      </a:r>
+                    </a:p>
+                  </a:txBody>
+                  <a:tcPr>
+                    <a:solidFill>
+                      <a:srgbClr val="FFFFFF"/>
+                    </a:solidFill>
+                  </a:tcPr>
+                </a:tc>
+              </a:tr>
+              <a:tr h="384048">
+                <a:tc>
+                  <a:txBody>
+                    <a:bodyPr/>
+                    <a:lstStyle/>
+                    <a:p>
+                      <a:pPr algn="l"/>
+                      <a:r>
+                        <a:rPr sz="1000" b="0">
+                          <a:solidFill>
+                            <a:srgbClr val="1D1B43"/>
+                          </a:solidFill>
+                          <a:latin typeface="Calibri"/>
+                        </a:rPr>
+                        <a:t>282696</a:t>
+                      </a:r>
+                    </a:p>
+                  </a:txBody>
+                  <a:tcPr>
+                    <a:solidFill>
+                      <a:srgbClr val="F2F2F2"/>
+                    </a:solidFill>
+                  </a:tcPr>
+                </a:tc>
+                <a:tc>
+                  <a:txBody>
+                    <a:bodyPr/>
+                    <a:lstStyle/>
+                    <a:p>
+                      <a:pPr algn="l"/>
+                      <a:r>
+                        <a:rPr sz="1000" b="0">
+                          <a:solidFill>
+                            <a:srgbClr val="1D1B43"/>
+                          </a:solidFill>
+                          <a:latin typeface="Calibri"/>
+                        </a:rPr>
+                        <a:t>HZ TELECOMUNICACOES - SAO PAULO / SP</a:t>
+                      </a:r>
+                    </a:p>
+                  </a:txBody>
+                  <a:tcPr>
+                    <a:solidFill>
+                      <a:srgbClr val="F2F2F2"/>
+                    </a:solidFill>
+                  </a:tcPr>
+                </a:tc>
+                <a:tc>
+                  <a:txBody>
+                    <a:bodyPr/>
+                    <a:lstStyle/>
+                    <a:p>
+                      <a:pPr algn="l"/>
+                      <a:r>
+                        <a:rPr sz="1000" b="0">
+                          <a:solidFill>
+                            <a:srgbClr val="1D1B43"/>
+                          </a:solidFill>
+                          <a:latin typeface="Calibri"/>
+                        </a:rPr>
+                        <a:t>SAO PAULO/SP</a:t>
+                      </a:r>
+                    </a:p>
+                  </a:txBody>
+                  <a:tcPr>
+                    <a:solidFill>
+                      <a:srgbClr val="F2F2F2"/>
+                    </a:solidFill>
+                  </a:tcPr>
+                </a:tc>
+                <a:tc>
+                  <a:txBody>
+                    <a:bodyPr/>
+                    <a:lstStyle/>
+                    <a:p>
+                      <a:pPr algn="l"/>
+                      <a:r>
+                        <a:rPr sz="1000" b="0">
+                          <a:solidFill>
+                            <a:srgbClr val="1D1B43"/>
+                          </a:solidFill>
+                          <a:latin typeface="Calibri"/>
+                        </a:rPr>
+                        <a:t>13/05/2026</a:t>
+                      </a:r>
+                    </a:p>
+                  </a:txBody>
+                  <a:tcPr>
+                    <a:solidFill>
+                      <a:srgbClr val="F2F2F2"/>
+                    </a:solidFill>
+                  </a:tcPr>
+                </a:tc>
+                <a:tc>
+                  <a:txBody>
+                    <a:bodyPr/>
+                    <a:lstStyle/>
+                    <a:p>
+                      <a:pPr algn="l"/>
+                      <a:r>
+                        <a:rPr sz="1000" b="0">
+                          <a:solidFill>
+                            <a:srgbClr val="1D1B43"/>
+                          </a:solidFill>
+                          <a:latin typeface="Calibri"/>
+                        </a:rPr>
+                        <a:t>ENTREGUE FORA DO PRAZO</a:t>
+                      </a:r>
+                    </a:p>
+                  </a:txBody>
+                  <a:tcPr>
+                    <a:solidFill>
+                      <a:srgbClr val="F2F2F2"/>
+                    </a:solidFill>
+                  </a:tcPr>
+                </a:tc>
+              </a:tr>
+              <a:tr h="384048">
+                <a:tc>
+                  <a:txBody>
+                    <a:bodyPr/>
+                    <a:lstStyle/>
+                    <a:p>
+                      <a:pPr algn="l"/>
+                      <a:r>
+                        <a:rPr sz="1000" b="0">
+                          <a:solidFill>
+                            <a:srgbClr val="1D1B43"/>
+                          </a:solidFill>
+                          <a:latin typeface="Calibri"/>
+                        </a:rPr>
+                        <a:t>283650</a:t>
+                      </a:r>
+                    </a:p>
+                  </a:txBody>
+                  <a:tcPr>
+                    <a:solidFill>
+                      <a:srgbClr val="FFFFFF"/>
+                    </a:solidFill>
+                  </a:tcPr>
+                </a:tc>
+                <a:tc>
+                  <a:txBody>
+                    <a:bodyPr/>
+                    <a:lstStyle/>
+                    <a:p>
+                      <a:pPr algn="l"/>
+                      <a:r>
+                        <a:rPr sz="1000" b="0">
+                          <a:solidFill>
+                            <a:srgbClr val="1D1B43"/>
+                          </a:solidFill>
+                          <a:latin typeface="Calibri"/>
+                        </a:rPr>
+                        <a:t>PORTOEXPRESS LOGISTI - ITAJAI / SC</a:t>
+                      </a:r>
+                    </a:p>
+                  </a:txBody>
+                  <a:tcPr>
+                    <a:solidFill>
+                      <a:srgbClr val="FFFFFF"/>
+                    </a:solidFill>
+                  </a:tcPr>
+                </a:tc>
+                <a:tc>
+                  <a:txBody>
+                    <a:bodyPr/>
+                    <a:lstStyle/>
+                    <a:p>
+                      <a:pPr algn="l"/>
+                      <a:r>
+                        <a:rPr sz="1000" b="0">
+                          <a:solidFill>
+                            <a:srgbClr val="1D1B43"/>
+                          </a:solidFill>
+                          <a:latin typeface="Calibri"/>
+                        </a:rPr>
+                        <a:t>ITAJAI/SC</a:t>
+                      </a:r>
+                    </a:p>
+                  </a:txBody>
+                  <a:tcPr>
+                    <a:solidFill>
+                      <a:srgbClr val="FFFFFF"/>
+                    </a:solidFill>
+                  </a:tcPr>
+                </a:tc>
+                <a:tc>
+                  <a:txBody>
+                    <a:bodyPr/>
+                    <a:lstStyle/>
+                    <a:p>
+                      <a:pPr algn="l"/>
+                      <a:r>
+                        <a:rPr sz="1000" b="0">
+                          <a:solidFill>
+                            <a:srgbClr val="1D1B43"/>
+                          </a:solidFill>
+                          <a:latin typeface="Calibri"/>
+                        </a:rPr>
+                        <a:t>20/05/2026</a:t>
+                      </a:r>
+                    </a:p>
+                  </a:txBody>
+                  <a:tcPr>
+                    <a:solidFill>
+                      <a:srgbClr val="FFFFFF"/>
+                    </a:solidFill>
+                  </a:tcPr>
+                </a:tc>
+                <a:tc>
+                  <a:txBody>
+                    <a:bodyPr/>
+                    <a:lstStyle/>
+                    <a:p>
+                      <a:pPr algn="l"/>
+                      <a:r>
+                        <a:rPr sz="1000" b="0">
+                          <a:solidFill>
+                            <a:srgbClr val="1D1B43"/>
+                          </a:solidFill>
+                          <a:latin typeface="Calibri"/>
+                        </a:rPr>
+                        <a:t>ENTREGUE FORA DO PRAZO</a:t>
+                      </a:r>
+                    </a:p>
+                  </a:txBody>
+                  <a:tcPr>
+                    <a:solidFill>
+                      <a:srgbClr val="FFFFFF"/>
+                    </a:solidFill>
+                  </a:tcPr>
+                </a:tc>
+              </a:tr>
+              <a:tr h="384048">
+                <a:tc>
+                  <a:txBody>
+                    <a:bodyPr/>
+                    <a:lstStyle/>
+                    <a:p>
+                      <a:pPr algn="l"/>
+                      <a:r>
+                        <a:rPr sz="1000" b="0">
+                          <a:solidFill>
+                            <a:srgbClr val="1D1B43"/>
+                          </a:solidFill>
+                          <a:latin typeface="Calibri"/>
+                        </a:rPr>
+                        <a:t>284030</a:t>
+                      </a:r>
+                    </a:p>
+                  </a:txBody>
+                  <a:tcPr>
+                    <a:solidFill>
+                      <a:srgbClr val="F2F2F2"/>
+                    </a:solidFill>
+                  </a:tcPr>
+                </a:tc>
+                <a:tc>
+                  <a:txBody>
+                    <a:bodyPr/>
+                    <a:lstStyle/>
+                    <a:p>
+                      <a:pPr algn="l"/>
+                      <a:r>
+                        <a:rPr sz="1000" b="0">
+                          <a:solidFill>
+                            <a:srgbClr val="1D1B43"/>
+                          </a:solidFill>
+                          <a:latin typeface="Calibri"/>
+                        </a:rPr>
+                        <a:t>UNIUBE - UNIVERSIDAD - UBERABA / MG</a:t>
+                      </a:r>
+                    </a:p>
+                  </a:txBody>
+                  <a:tcPr>
+                    <a:solidFill>
+                      <a:srgbClr val="F2F2F2"/>
+                    </a:solidFill>
+                  </a:tcPr>
+                </a:tc>
+                <a:tc>
+                  <a:txBody>
+                    <a:bodyPr/>
+                    <a:lstStyle/>
+                    <a:p>
+                      <a:pPr algn="l"/>
+                      <a:r>
+                        <a:rPr sz="1000" b="0">
+                          <a:solidFill>
+                            <a:srgbClr val="1D1B43"/>
+                          </a:solidFill>
+                          <a:latin typeface="Calibri"/>
+                        </a:rPr>
+                        <a:t>UBERABA/MG</a:t>
+                      </a:r>
+                    </a:p>
+                  </a:txBody>
+                  <a:tcPr>
+                    <a:solidFill>
+                      <a:srgbClr val="F2F2F2"/>
+                    </a:solidFill>
+                  </a:tcPr>
+                </a:tc>
+                <a:tc>
+                  <a:txBody>
+                    <a:bodyPr/>
+                    <a:lstStyle/>
+                    <a:p>
+                      <a:pPr algn="l"/>
+                      <a:r>
+                        <a:rPr sz="1000" b="0">
+                          <a:solidFill>
+                            <a:srgbClr val="1D1B43"/>
+                          </a:solidFill>
+                          <a:latin typeface="Calibri"/>
+                        </a:rPr>
+                        <a:t>26/05/2026</a:t>
+                      </a:r>
+                    </a:p>
+                  </a:txBody>
+                  <a:tcPr>
+                    <a:solidFill>
+                      <a:srgbClr val="F2F2F2"/>
+                    </a:solidFill>
+                  </a:tcPr>
+                </a:tc>
+                <a:tc>
+                  <a:txBody>
+                    <a:bodyPr/>
+                    <a:lstStyle/>
+                    <a:p>
+                      <a:pPr algn="l"/>
+                      <a:r>
+                        <a:rPr sz="1000" b="0">
+                          <a:solidFill>
+                            <a:srgbClr val="1D1B43"/>
+                          </a:solidFill>
+                          <a:latin typeface="Calibri"/>
+                        </a:rPr>
+                        <a:t>ENTREGUE FORA DO PRAZO</a:t>
+                      </a:r>
+                    </a:p>
+                  </a:txBody>
+                  <a:tcPr>
+                    <a:solidFill>
+                      <a:srgbClr val="F2F2F2"/>
+                    </a:solidFill>
+                  </a:tcPr>
+                </a:tc>
+              </a:tr>
+              <a:tr h="384048">
+                <a:tc>
+                  <a:txBody>
+                    <a:bodyPr/>
+                    <a:lstStyle/>
+                    <a:p>
+                      <a:pPr algn="l"/>
+                      <a:r>
+                        <a:rPr sz="1000" b="0">
+                          <a:solidFill>
+                            <a:srgbClr val="1D1B43"/>
+                          </a:solidFill>
+                          <a:latin typeface="Calibri"/>
+                        </a:rPr>
+                        <a:t>284917</a:t>
+                      </a:r>
+                    </a:p>
+                  </a:txBody>
+                  <a:tcPr>
+                    <a:solidFill>
+                      <a:srgbClr val="FFFFFF"/>
+                    </a:solidFill>
+                  </a:tcPr>
+                </a:tc>
+                <a:tc>
+                  <a:txBody>
+                    <a:bodyPr/>
+                    <a:lstStyle/>
+                    <a:p>
+                      <a:pPr algn="l"/>
+                      <a:r>
+                        <a:rPr sz="1000" b="0">
+                          <a:solidFill>
+                            <a:srgbClr val="1D1B43"/>
+                          </a:solidFill>
+                          <a:latin typeface="Calibri"/>
+                        </a:rPr>
+                        <a:t>PORTOEXPRESS LOGISTI - ITAJAI / SC</a:t>
+                      </a:r>
+                    </a:p>
+                  </a:txBody>
+                  <a:tcPr>
+                    <a:solidFill>
+                      <a:srgbClr val="FFFFFF"/>
+                    </a:solidFill>
+                  </a:tcPr>
+                </a:tc>
+                <a:tc>
+                  <a:txBody>
+                    <a:bodyPr/>
+                    <a:lstStyle/>
+                    <a:p>
+                      <a:pPr algn="l"/>
+                      <a:r>
+                        <a:rPr sz="1000" b="0">
+                          <a:solidFill>
+                            <a:srgbClr val="1D1B43"/>
+                          </a:solidFill>
+                          <a:latin typeface="Calibri"/>
+                        </a:rPr>
+                        <a:t>ITAJAI/SC</a:t>
+                      </a:r>
+                    </a:p>
+                  </a:txBody>
+                  <a:tcPr>
+                    <a:solidFill>
+                      <a:srgbClr val="FFFFFF"/>
+                    </a:solidFill>
+                  </a:tcPr>
+                </a:tc>
+                <a:tc>
+                  <a:txBody>
+                    <a:bodyPr/>
+                    <a:lstStyle/>
+                    <a:p>
+                      <a:pPr algn="l"/>
+                      <a:r>
+                        <a:rPr sz="1000" b="0">
+                          <a:solidFill>
+                            <a:srgbClr val="1D1B43"/>
+                          </a:solidFill>
+                          <a:latin typeface="Calibri"/>
+                        </a:rPr>
+                        <a:t>27/05/2026</a:t>
+                      </a:r>
+                    </a:p>
+                  </a:txBody>
+                  <a:tcPr>
+                    <a:solidFill>
+                      <a:srgbClr val="FFFFFF"/>
+                    </a:solidFill>
+                  </a:tcPr>
+                </a:tc>
+                <a:tc>
+                  <a:txBody>
+                    <a:bodyPr/>
+                    <a:lstStyle/>
+                    <a:p>
+                      <a:pPr algn="l"/>
+                      <a:r>
+                        <a:rPr sz="1000" b="0">
+                          <a:solidFill>
+                            <a:srgbClr val="1D1B43"/>
+                          </a:solidFill>
+                          <a:latin typeface="Calibri"/>
+                        </a:rPr>
                         <a:t>FORA DO PRAZO</a:t>
                       </a:r>
                     </a:p>
                   </a:txBody>
                   <a:tcPr>
                     <a:solidFill>
-                      <a:srgbClr val="F2F2F2"/>
+                      <a:srgbClr val="FFFFFF"/>
                     </a:solidFill>
                   </a:tcPr>
                 </a:tc>
@@ -5841,7 +6426,7 @@
         </p:nvGraphicFramePr>
         <p:xfrm>
           <a:off x="731520" y="1920240"/>
-          <a:ext cx="10698480" cy="3657600"/>
+          <a:ext cx="10698480" cy="2743200"/>
         </p:xfrm>
         <a:graphic>
           <a:graphicData uri="http://schemas.openxmlformats.org/drawingml/2006/table">
@@ -6034,7 +6619,7 @@
                           </a:solidFill>
                           <a:latin typeface="Calibri"/>
                         </a:rPr>
-                        <a:t>18</a:t>
+                        <a:t>10</a:t>
                       </a:r>
                     </a:p>
                   </a:txBody>
@@ -6057,7 +6642,7 @@
                           </a:solidFill>
                           <a:latin typeface="Calibri"/>
                         </a:rPr>
-                        <a:t>18</a:t>
+                        <a:t>7</a:t>
                       </a:r>
                     </a:p>
                   </a:txBody>
@@ -6080,7 +6665,7 @@
                           </a:solidFill>
                           <a:latin typeface="Calibri"/>
                         </a:rPr>
-                        <a:t>0</a:t>
+                        <a:t>3</a:t>
                       </a:r>
                     </a:p>
                   </a:txBody>
@@ -6103,7 +6688,7 @@
                           </a:solidFill>
                           <a:latin typeface="Calibri"/>
                         </a:rPr>
-                        <a:t>100.0%</a:t>
+                        <a:t>70.0%</a:t>
                       </a:r>
                     </a:p>
                   </a:txBody>
@@ -6126,7 +6711,7 @@
                           </a:solidFill>
                           <a:latin typeface="Calibri"/>
                         </a:rPr>
-                        <a:t>Excelente</a:t>
+                        <a:t>Atencao</a:t>
                       </a:r>
                     </a:p>
                   </a:txBody>
@@ -6174,7 +6759,7 @@
                           </a:solidFill>
                           <a:latin typeface="Calibri"/>
                         </a:rPr>
-                        <a:t>11</a:t>
+                        <a:t>6</a:t>
                       </a:r>
                     </a:p>
                   </a:txBody>
@@ -6197,7 +6782,7 @@
                           </a:solidFill>
                           <a:latin typeface="Calibri"/>
                         </a:rPr>
-                        <a:t>10</a:t>
+                        <a:t>4</a:t>
                       </a:r>
                     </a:p>
                   </a:txBody>
@@ -6220,7 +6805,7 @@
                           </a:solidFill>
                           <a:latin typeface="Calibri"/>
                         </a:rPr>
-                        <a:t>1</a:t>
+                        <a:t>2</a:t>
                       </a:r>
                     </a:p>
                   </a:txBody>
@@ -6243,7 +6828,7 @@
                           </a:solidFill>
                           <a:latin typeface="Calibri"/>
                         </a:rPr>
-                        <a:t>90.9%</a:t>
+                        <a:t>66.7%</a:t>
                       </a:r>
                     </a:p>
                   </a:txBody>
@@ -6266,7 +6851,7 @@
                           </a:solidFill>
                           <a:latin typeface="Calibri"/>
                         </a:rPr>
-                        <a:t>Regular</a:t>
+                        <a:t>Atencao</a:t>
                       </a:r>
                     </a:p>
                   </a:txBody>
@@ -6291,7 +6876,7 @@
                           </a:solidFill>
                           <a:latin typeface="Calibri"/>
                         </a:rPr>
-                        <a:t>MG</a:t>
+                        <a:t>BA</a:t>
                       </a:r>
                     </a:p>
                   </a:txBody>
@@ -6314,7 +6899,7 @@
                           </a:solidFill>
                           <a:latin typeface="Calibri"/>
                         </a:rPr>
-                        <a:t>3</a:t>
+                        <a:t>2</a:t>
                       </a:r>
                     </a:p>
                   </a:txBody>
@@ -6337,7 +6922,7 @@
                           </a:solidFill>
                           <a:latin typeface="Calibri"/>
                         </a:rPr>
-                        <a:t>3</a:t>
+                        <a:t>2</a:t>
                       </a:r>
                     </a:p>
                   </a:txBody>
@@ -6431,7 +7016,7 @@
                           </a:solidFill>
                           <a:latin typeface="Calibri"/>
                         </a:rPr>
-                        <a:t>PA</a:t>
+                        <a:t>MG</a:t>
                       </a:r>
                     </a:p>
                   </a:txBody>
@@ -6454,7 +7039,7 @@
                           </a:solidFill>
                           <a:latin typeface="Calibri"/>
                         </a:rPr>
-                        <a:t>1</a:t>
+                        <a:t>2</a:t>
                       </a:r>
                     </a:p>
                   </a:txBody>
@@ -6477,7 +7062,7 @@
                           </a:solidFill>
                           <a:latin typeface="Calibri"/>
                         </a:rPr>
-                        <a:t>1</a:t>
+                        <a:t>0</a:t>
                       </a:r>
                     </a:p>
                   </a:txBody>
@@ -6500,7 +7085,7 @@
                           </a:solidFill>
                           <a:latin typeface="Calibri"/>
                         </a:rPr>
-                        <a:t>0</a:t>
+                        <a:t>2</a:t>
                       </a:r>
                     </a:p>
                   </a:txBody>
@@ -6523,7 +7108,7 @@
                           </a:solidFill>
                           <a:latin typeface="Calibri"/>
                         </a:rPr>
-                        <a:t>100.0%</a:t>
+                        <a:t>0.0%</a:t>
                       </a:r>
                     </a:p>
                   </a:txBody>
@@ -6546,7 +7131,7 @@
                           </a:solidFill>
                           <a:latin typeface="Calibri"/>
                         </a:rPr>
-                        <a:t>Excelente</a:t>
+                        <a:t>Atencao</a:t>
                       </a:r>
                     </a:p>
                   </a:txBody>
@@ -6571,7 +7156,7 @@
                           </a:solidFill>
                           <a:latin typeface="Calibri"/>
                         </a:rPr>
-                        <a:t>DF</a:t>
+                        <a:t>MT</a:t>
                       </a:r>
                     </a:p>
                   </a:txBody>
@@ -6687,286 +7272,6 @@
                           <a:latin typeface="Calibri"/>
                         </a:rPr>
                         <a:t>Excelente</a:t>
-                      </a:r>
-                    </a:p>
-                  </a:txBody>
-                  <a:tcPr>
-                    <a:solidFill>
-                      <a:srgbClr val="FFFFFF"/>
-                    </a:solidFill>
-                  </a:tcPr>
-                </a:tc>
-              </a:tr>
-              <a:tr h="457200">
-                <a:tc>
-                  <a:txBody>
-                    <a:bodyPr/>
-                    <a:lstStyle/>
-                    <a:p>
-                      <a:pPr algn="l"/>
-                      <a:r>
-                        <a:rPr sz="1000" b="0">
-                          <a:solidFill>
-                            <a:srgbClr val="1D1B43"/>
-                          </a:solidFill>
-                          <a:latin typeface="Calibri"/>
-                        </a:rPr>
-                        <a:t>RJ</a:t>
-                      </a:r>
-                    </a:p>
-                  </a:txBody>
-                  <a:tcPr>
-                    <a:solidFill>
-                      <a:srgbClr val="F2F2F2"/>
-                    </a:solidFill>
-                  </a:tcPr>
-                </a:tc>
-                <a:tc>
-                  <a:txBody>
-                    <a:bodyPr/>
-                    <a:lstStyle/>
-                    <a:p>
-                      <a:pPr algn="l"/>
-                      <a:r>
-                        <a:rPr sz="1000" b="0">
-                          <a:solidFill>
-                            <a:srgbClr val="1D1B43"/>
-                          </a:solidFill>
-                          <a:latin typeface="Calibri"/>
-                        </a:rPr>
-                        <a:t>1</a:t>
-                      </a:r>
-                    </a:p>
-                  </a:txBody>
-                  <a:tcPr>
-                    <a:solidFill>
-                      <a:srgbClr val="F2F2F2"/>
-                    </a:solidFill>
-                  </a:tcPr>
-                </a:tc>
-                <a:tc>
-                  <a:txBody>
-                    <a:bodyPr/>
-                    <a:lstStyle/>
-                    <a:p>
-                      <a:pPr algn="l"/>
-                      <a:r>
-                        <a:rPr sz="1000" b="0">
-                          <a:solidFill>
-                            <a:srgbClr val="1D1B43"/>
-                          </a:solidFill>
-                          <a:latin typeface="Calibri"/>
-                        </a:rPr>
-                        <a:t>1</a:t>
-                      </a:r>
-                    </a:p>
-                  </a:txBody>
-                  <a:tcPr>
-                    <a:solidFill>
-                      <a:srgbClr val="F2F2F2"/>
-                    </a:solidFill>
-                  </a:tcPr>
-                </a:tc>
-                <a:tc>
-                  <a:txBody>
-                    <a:bodyPr/>
-                    <a:lstStyle/>
-                    <a:p>
-                      <a:pPr algn="l"/>
-                      <a:r>
-                        <a:rPr sz="1000" b="0">
-                          <a:solidFill>
-                            <a:srgbClr val="1D1B43"/>
-                          </a:solidFill>
-                          <a:latin typeface="Calibri"/>
-                        </a:rPr>
-                        <a:t>0</a:t>
-                      </a:r>
-                    </a:p>
-                  </a:txBody>
-                  <a:tcPr>
-                    <a:solidFill>
-                      <a:srgbClr val="F2F2F2"/>
-                    </a:solidFill>
-                  </a:tcPr>
-                </a:tc>
-                <a:tc>
-                  <a:txBody>
-                    <a:bodyPr/>
-                    <a:lstStyle/>
-                    <a:p>
-                      <a:pPr algn="l"/>
-                      <a:r>
-                        <a:rPr sz="1000" b="0">
-                          <a:solidFill>
-                            <a:srgbClr val="1D1B43"/>
-                          </a:solidFill>
-                          <a:latin typeface="Calibri"/>
-                        </a:rPr>
-                        <a:t>100.0%</a:t>
-                      </a:r>
-                    </a:p>
-                  </a:txBody>
-                  <a:tcPr>
-                    <a:solidFill>
-                      <a:srgbClr val="F2F2F2"/>
-                    </a:solidFill>
-                  </a:tcPr>
-                </a:tc>
-                <a:tc>
-                  <a:txBody>
-                    <a:bodyPr/>
-                    <a:lstStyle/>
-                    <a:p>
-                      <a:pPr algn="l"/>
-                      <a:r>
-                        <a:rPr sz="1000" b="0">
-                          <a:solidFill>
-                            <a:srgbClr val="1D1B43"/>
-                          </a:solidFill>
-                          <a:latin typeface="Calibri"/>
-                        </a:rPr>
-                        <a:t>Excelente</a:t>
-                      </a:r>
-                    </a:p>
-                  </a:txBody>
-                  <a:tcPr>
-                    <a:solidFill>
-                      <a:srgbClr val="F2F2F2"/>
-                    </a:solidFill>
-                  </a:tcPr>
-                </a:tc>
-              </a:tr>
-              <a:tr h="457200">
-                <a:tc>
-                  <a:txBody>
-                    <a:bodyPr/>
-                    <a:lstStyle/>
-                    <a:p>
-                      <a:pPr algn="l"/>
-                      <a:r>
-                        <a:rPr sz="1000" b="0">
-                          <a:solidFill>
-                            <a:srgbClr val="1D1B43"/>
-                          </a:solidFill>
-                          <a:latin typeface="Calibri"/>
-                        </a:rPr>
-                        <a:t>PR</a:t>
-                      </a:r>
-                    </a:p>
-                  </a:txBody>
-                  <a:tcPr>
-                    <a:solidFill>
-                      <a:srgbClr val="FFFFFF"/>
-                    </a:solidFill>
-                  </a:tcPr>
-                </a:tc>
-                <a:tc>
-                  <a:txBody>
-                    <a:bodyPr/>
-                    <a:lstStyle/>
-                    <a:p>
-                      <a:pPr algn="l"/>
-                      <a:r>
-                        <a:rPr sz="1000" b="0">
-                          <a:solidFill>
-                            <a:srgbClr val="1D1B43"/>
-                          </a:solidFill>
-                          <a:latin typeface="Calibri"/>
-                        </a:rPr>
-                        <a:t>1</a:t>
-                      </a:r>
-                    </a:p>
-                  </a:txBody>
-                  <a:tcPr>
-                    <a:solidFill>
-                      <a:srgbClr val="FFFFFF"/>
-                    </a:solidFill>
-                  </a:tcPr>
-                </a:tc>
-                <a:tc>
-                  <a:txBody>
-                    <a:bodyPr/>
-                    <a:lstStyle/>
-                    <a:p>
-                      <a:pPr algn="l"/>
-                      <a:r>
-                        <a:rPr sz="1000" b="0">
-                          <a:solidFill>
-                            <a:srgbClr val="1D1B43"/>
-                          </a:solidFill>
-                          <a:latin typeface="Calibri"/>
-                        </a:rPr>
-                        <a:t>0</a:t>
-                      </a:r>
-                    </a:p>
-                  </a:txBody>
-                  <a:tcPr>
-                    <a:solidFill>
-                      <a:srgbClr val="FFFFFF"/>
-                    </a:solidFill>
-                  </a:tcPr>
-                </a:tc>
-                <a:tc>
-                  <a:txBody>
-                    <a:bodyPr/>
-                    <a:lstStyle/>
-                    <a:p>
-                      <a:pPr algn="l"/>
-                      <a:r>
-                        <a:rPr sz="1000" b="0">
-                          <a:solidFill>
-                            <a:srgbClr val="1D1B43"/>
-                          </a:solidFill>
-                          <a:latin typeface="Calibri"/>
-                        </a:rPr>
-                        <a:t>1</a:t>
-                      </a:r>
-                    </a:p>
-                  </a:txBody>
-                  <a:tcPr>
-                    <a:solidFill>
-                      <a:srgbClr val="FFFFFF"/>
-                    </a:solidFill>
-                  </a:tcPr>
-                </a:tc>
-                <a:tc>
-                  <a:txBody>
-                    <a:bodyPr/>
-                    <a:lstStyle/>
-                    <a:p>
-                      <a:pPr algn="l"/>
-                      <a:r>
-                        <a:rPr sz="1000" b="0">
-                          <a:solidFill>
-                            <a:srgbClr val="1D1B43"/>
-                          </a:solidFill>
-                          <a:latin typeface="Calibri"/>
-                        </a:rPr>
-                        <a:t>0.0%</a:t>
-                      </a:r>
-                    </a:p>
-                  </a:txBody>
-                  <a:tcPr>
-                    <a:solidFill>
-                      <a:srgbClr val="FFFFFF"/>
-                    </a:solidFill>
-                  </a:tcPr>
-                </a:tc>
-                <a:tc>
-                  <a:txBody>
-                    <a:bodyPr/>
-                    <a:lstStyle/>
-                    <a:p>
-                      <a:pPr algn="l"/>
-                      <a:r>
-                        <a:rPr sz="1000" b="0">
-                          <a:solidFill>
-                            <a:srgbClr val="1D1B43"/>
-                          </a:solidFill>
-                          <a:latin typeface="Calibri"/>
-                        </a:rPr>
-                        <a:t>Atencao</a:t>
                       </a:r>
                     </a:p>
                   </a:txBody>
@@ -7061,7 +7366,7 @@
                 </a:solidFill>
                 <a:latin typeface="Calibri"/>
               </a:rPr>
-              <a:t>TOP DESTINATARIOS (26 pontos)</a:t>
+              <a:t>TOP DESTINATARIOS (17 pontos)</a:t>
             </a:r>
           </a:p>
         </p:txBody>
@@ -7359,7 +7664,7 @@
                           </a:solidFill>
                           <a:latin typeface="Calibri"/>
                         </a:rPr>
-                        <a:t>8</a:t>
+                        <a:t>4</a:t>
                       </a:r>
                     </a:p>
                   </a:txBody>
@@ -7382,7 +7687,7 @@
                           </a:solidFill>
                           <a:latin typeface="Calibri"/>
                         </a:rPr>
-                        <a:t>7</a:t>
+                        <a:t>2</a:t>
                       </a:r>
                     </a:p>
                   </a:txBody>
@@ -7405,7 +7710,7 @@
                           </a:solidFill>
                           <a:latin typeface="Calibri"/>
                         </a:rPr>
-                        <a:t>1</a:t>
+                        <a:t>2</a:t>
                       </a:r>
                     </a:p>
                   </a:txBody>
@@ -7428,7 +7733,7 @@
                           </a:solidFill>
                           <a:latin typeface="Calibri"/>
                         </a:rPr>
-                        <a:t>87.5%</a:t>
+                        <a:t>50.0%</a:t>
                       </a:r>
                     </a:p>
                   </a:txBody>
@@ -7451,7 +7756,7 @@
                           </a:solidFill>
                           <a:latin typeface="Calibri"/>
                         </a:rPr>
-                        <a:t>Regular</a:t>
+                        <a:t>Atencao</a:t>
                       </a:r>
                     </a:p>
                   </a:txBody>
@@ -7499,7 +7804,7 @@
                           </a:solidFill>
                           <a:latin typeface="Calibri"/>
                         </a:rPr>
-                        <a:t>FUNDACAO DE DESENVOL - CAMPINAS / SP</a:t>
+                        <a:t>HZ TELECOMUNICACOES - SAO PAULO / SP</a:t>
                       </a:r>
                     </a:p>
                   </a:txBody>
@@ -7545,7 +7850,7 @@
                           </a:solidFill>
                           <a:latin typeface="Calibri"/>
                         </a:rPr>
-                        <a:t>2</a:t>
+                        <a:t>1</a:t>
                       </a:r>
                     </a:p>
                   </a:txBody>
@@ -7568,7 +7873,7 @@
                           </a:solidFill>
                           <a:latin typeface="Calibri"/>
                         </a:rPr>
-                        <a:t>0</a:t>
+                        <a:t>1</a:t>
                       </a:r>
                     </a:p>
                   </a:txBody>
@@ -7591,7 +7896,7 @@
                           </a:solidFill>
                           <a:latin typeface="Calibri"/>
                         </a:rPr>
-                        <a:t>100.0%</a:t>
+                        <a:t>50.0%</a:t>
                       </a:r>
                     </a:p>
                   </a:txBody>
@@ -7614,7 +7919,7 @@
                           </a:solidFill>
                           <a:latin typeface="Calibri"/>
                         </a:rPr>
-                        <a:t>Excelente</a:t>
+                        <a:t>Atencao</a:t>
                       </a:r>
                     </a:p>
                   </a:txBody>
@@ -7662,7 +7967,7 @@
                           </a:solidFill>
                           <a:latin typeface="Calibri"/>
                         </a:rPr>
-                        <a:t>HOSPITAL E MATERNIDA - SAO PAULO / SP</a:t>
+                        <a:t>BRAVO ARMAZENS GERAI - UBERABA / MG</a:t>
                       </a:r>
                     </a:p>
                   </a:txBody>
@@ -7685,7 +7990,7 @@
                           </a:solidFill>
                           <a:latin typeface="Calibri"/>
                         </a:rPr>
-                        <a:t>2</a:t>
+                        <a:t>1</a:t>
                       </a:r>
                     </a:p>
                   </a:txBody>
@@ -7708,7 +8013,7 @@
                           </a:solidFill>
                           <a:latin typeface="Calibri"/>
                         </a:rPr>
-                        <a:t>2</a:t>
+                        <a:t>0</a:t>
                       </a:r>
                     </a:p>
                   </a:txBody>
@@ -7731,7 +8036,7 @@
                           </a:solidFill>
                           <a:latin typeface="Calibri"/>
                         </a:rPr>
-                        <a:t>0</a:t>
+                        <a:t>1</a:t>
                       </a:r>
                     </a:p>
                   </a:txBody>
@@ -7754,7 +8059,7 @@
                           </a:solidFill>
                           <a:latin typeface="Calibri"/>
                         </a:rPr>
-                        <a:t>100.0%</a:t>
+                        <a:t>0.0%</a:t>
                       </a:r>
                     </a:p>
                   </a:txBody>
@@ -7777,7 +8082,7 @@
                           </a:solidFill>
                           <a:latin typeface="Calibri"/>
                         </a:rPr>
-                        <a:t>Excelente</a:t>
+                        <a:t>Atencao</a:t>
                       </a:r>
                     </a:p>
                   </a:txBody>
@@ -7825,7 +8130,7 @@
                           </a:solidFill>
                           <a:latin typeface="Calibri"/>
                         </a:rPr>
-                        <a:t>INSTITUTO PRESBITERI - SAO PAULO / SP</a:t>
+                        <a:t>FOSNOR - FOSFATAS DO - LUIS EDUARDO MAGALHAES / </a:t>
                       </a:r>
                     </a:p>
                   </a:txBody>
@@ -7848,7 +8153,7 @@
                           </a:solidFill>
                           <a:latin typeface="Calibri"/>
                         </a:rPr>
-                        <a:t>2</a:t>
+                        <a:t>1</a:t>
                       </a:r>
                     </a:p>
                   </a:txBody>
@@ -7871,7 +8176,7 @@
                           </a:solidFill>
                           <a:latin typeface="Calibri"/>
                         </a:rPr>
-                        <a:t>2</a:t>
+                        <a:t>1</a:t>
                       </a:r>
                     </a:p>
                   </a:txBody>
@@ -7988,7 +8293,7 @@
                           </a:solidFill>
                           <a:latin typeface="Calibri"/>
                         </a:rPr>
-                        <a:t>AMC SERVICOS EDUCACI - SAO PAULO / SP</a:t>
+                        <a:t>COMP BRASILEIRA DE E - JUNDIAI / SP</a:t>
                       </a:r>
                     </a:p>
                   </a:txBody>
@@ -8151,7 +8456,7 @@
                           </a:solidFill>
                           <a:latin typeface="Calibri"/>
                         </a:rPr>
-                        <a:t>BRAVO ARMAZENS GERAI - UBERABA / MG</a:t>
+                        <a:t>FUNDACAO DE DESENVOL - CAMPINAS / SP</a:t>
                       </a:r>
                     </a:p>
                   </a:txBody>
@@ -8314,7 +8619,7 @@
                           </a:solidFill>
                           <a:latin typeface="Calibri"/>
                         </a:rPr>
-                        <a:t>ECOPORTO SANTOS S.A. - SANTOS / SP</a:t>
+                        <a:t>FUNDACAO DE ROTARIAN - SAO CAETANO DO SUL / SP</a:t>
                       </a:r>
                     </a:p>
                   </a:txBody>
@@ -8477,7 +8782,7 @@
                           </a:solidFill>
                           <a:latin typeface="Calibri"/>
                         </a:rPr>
-                        <a:t>AURORA TERMINAIS E S - SOROCABA / SP</a:t>
+                        <a:t>FUNDACAO UNIVERSIDAD - SAO CARLOS / SP</a:t>
                       </a:r>
                     </a:p>
                   </a:txBody>
@@ -8640,7 +8945,7 @@
                           </a:solidFill>
                           <a:latin typeface="Calibri"/>
                         </a:rPr>
-                        <a:t>COMPANHIA DE INFORMA - JUNDIAI / SP</a:t>
+                        <a:t>EDITORA POLIEDRO LTD - SAO JOSE DOS CAMPOS / SP</a:t>
                       </a:r>
                     </a:p>
                   </a:txBody>
@@ -8803,7 +9108,7 @@
                           </a:solidFill>
                           <a:latin typeface="Calibri"/>
                         </a:rPr>
-                        <a:t>A R J COMPANY ASSESS - SAO PAULO / SP</a:t>
+                        <a:t>MINERACAO CARAIBA S/ - JAGUARARI / BA</a:t>
                       </a:r>
                     </a:p>
                   </a:txBody>
@@ -8966,7 +9271,7 @@
                           </a:solidFill>
                           <a:latin typeface="Calibri"/>
                         </a:rPr>
-                        <a:t>FACEB EDUCACAO LTDA - CONSELHEIRO LAFAIETE / MG</a:t>
+                        <a:t>PET CENTER COMERCIO - SAO PAULO / SP</a:t>
                       </a:r>
                     </a:p>
                   </a:txBody>
@@ -9012,6 +9317,29 @@
                           </a:solidFill>
                           <a:latin typeface="Calibri"/>
                         </a:rPr>
+                        <a:t>0</a:t>
+                      </a:r>
+                    </a:p>
+                  </a:txBody>
+                  <a:tcPr>
+                    <a:solidFill>
+                      <a:srgbClr val="FFFFFF"/>
+                    </a:solidFill>
+                  </a:tcPr>
+                </a:tc>
+                <a:tc>
+                  <a:txBody>
+                    <a:bodyPr/>
+                    <a:lstStyle/>
+                    <a:p>
+                      <a:pPr algn="l"/>
+                      <a:r>
+                        <a:rPr sz="1000" b="0">
+                          <a:solidFill>
+                            <a:srgbClr val="1D1B43"/>
+                          </a:solidFill>
+                          <a:latin typeface="Calibri"/>
+                        </a:rPr>
                         <a:t>1</a:t>
                       </a:r>
                     </a:p>
@@ -9035,7 +9363,7 @@
                           </a:solidFill>
                           <a:latin typeface="Calibri"/>
                         </a:rPr>
-                        <a:t>0</a:t>
+                        <a:t>0.0%</a:t>
                       </a:r>
                     </a:p>
                   </a:txBody>
@@ -9058,30 +9386,7 @@
                           </a:solidFill>
                           <a:latin typeface="Calibri"/>
                         </a:rPr>
-                        <a:t>100.0%</a:t>
-                      </a:r>
-                    </a:p>
-                  </a:txBody>
-                  <a:tcPr>
-                    <a:solidFill>
-                      <a:srgbClr val="FFFFFF"/>
-                    </a:solidFill>
-                  </a:tcPr>
-                </a:tc>
-                <a:tc>
-                  <a:txBody>
-                    <a:bodyPr/>
-                    <a:lstStyle/>
-                    <a:p>
-                      <a:pPr algn="l"/>
-                      <a:r>
-                        <a:rPr sz="1000" b="0">
-                          <a:solidFill>
-                            <a:srgbClr val="1D1B43"/>
-                          </a:solidFill>
-                          <a:latin typeface="Calibri"/>
-                        </a:rPr>
-                        <a:t>Excelente</a:t>
+                        <a:t>Atencao</a:t>
                       </a:r>
                     </a:p>
                   </a:txBody>
@@ -9129,7 +9434,7 @@
                           </a:solidFill>
                           <a:latin typeface="Calibri"/>
                         </a:rPr>
-                        <a:t>EXPOCACER - COOPERAT - PATROCINIO / MG</a:t>
+                        <a:t>PETROCOQUE S A INDUS - CUBATAO / SP</a:t>
                       </a:r>
                     </a:p>
                   </a:txBody>
@@ -9292,7 +9597,7 @@
                           </a:solidFill>
                           <a:latin typeface="Calibri"/>
                         </a:rPr>
-                        <a:t>EMETH INFORMATICA LT - SAO PAULO / SP</a:t>
+                        <a:t>SEGER COMERCIAL IMP. - SAO PAULO / SP</a:t>
                       </a:r>
                     </a:p>
                   </a:txBody>
@@ -9338,6 +9643,29 @@
                           </a:solidFill>
                           <a:latin typeface="Calibri"/>
                         </a:rPr>
+                        <a:t>0</a:t>
+                      </a:r>
+                    </a:p>
+                  </a:txBody>
+                  <a:tcPr>
+                    <a:solidFill>
+                      <a:srgbClr val="FFFFFF"/>
+                    </a:solidFill>
+                  </a:tcPr>
+                </a:tc>
+                <a:tc>
+                  <a:txBody>
+                    <a:bodyPr/>
+                    <a:lstStyle/>
+                    <a:p>
+                      <a:pPr algn="l"/>
+                      <a:r>
+                        <a:rPr sz="1000" b="0">
+                          <a:solidFill>
+                            <a:srgbClr val="1D1B43"/>
+                          </a:solidFill>
+                          <a:latin typeface="Calibri"/>
+                        </a:rPr>
                         <a:t>1</a:t>
                       </a:r>
                     </a:p>
@@ -9361,7 +9689,7 @@
                           </a:solidFill>
                           <a:latin typeface="Calibri"/>
                         </a:rPr>
-                        <a:t>0</a:t>
+                        <a:t>0.0%</a:t>
                       </a:r>
                     </a:p>
                   </a:txBody>
@@ -9384,30 +9712,7 @@
                           </a:solidFill>
                           <a:latin typeface="Calibri"/>
                         </a:rPr>
-                        <a:t>100.0%</a:t>
-                      </a:r>
-                    </a:p>
-                  </a:txBody>
-                  <a:tcPr>
-                    <a:solidFill>
-                      <a:srgbClr val="FFFFFF"/>
-                    </a:solidFill>
-                  </a:tcPr>
-                </a:tc>
-                <a:tc>
-                  <a:txBody>
-                    <a:bodyPr/>
-                    <a:lstStyle/>
-                    <a:p>
-                      <a:pPr algn="l"/>
-                      <a:r>
-                        <a:rPr sz="1000" b="0">
-                          <a:solidFill>
-                            <a:srgbClr val="1D1B43"/>
-                          </a:solidFill>
-                          <a:latin typeface="Calibri"/>
-                        </a:rPr>
-                        <a:t>Excelente</a:t>
+                        <a:t>Atencao</a:t>
                       </a:r>
                     </a:p>
                   </a:txBody>
@@ -9455,7 +9760,7 @@
                           </a:solidFill>
                           <a:latin typeface="Calibri"/>
                         </a:rPr>
-                        <a:t>HILTON DO BRASIL S.A - SAO PAULO / SP</a:t>
+                        <a:t>SEGER COMERCIAL IMPO - FLORIANOPOLIS / SC</a:t>
                       </a:r>
                     </a:p>
                   </a:txBody>
